--- a/WGRDBES-EST/newbies_guide/icesRDBES_guide_for_newbies_and_a_bit_more.pptx
+++ b/WGRDBES-EST/newbies_guide/icesRDBES_guide_for_newbies_and_a_bit_more.pptx
@@ -225,7 +225,7 @@
           <a:p>
             <a:fld id="{4D66E911-F793-4838-A7E0-22F5DC2E219F}" type="datetimeFigureOut">
               <a:rPr lang="da-DK" smtClean="0"/>
-              <a:t>03-02-2022</a:t>
+              <a:t>08-10-2026</a:t>
             </a:fld>
             <a:endParaRPr lang="da-DK"/>
           </a:p>
@@ -753,7 +753,7 @@
           </a:lstStyle>
           <a:p>
             <a:r>
-              <a:rPr lang="en-US" smtClean="0"/>
+              <a:rPr lang="en-US"/>
               <a:t>Click to edit Master title style</a:t>
             </a:r>
             <a:endParaRPr lang="en-GB" dirty="0"/>
@@ -919,7 +919,7 @@
           </a:lstStyle>
           <a:p>
             <a:r>
-              <a:rPr lang="en-US" smtClean="0"/>
+              <a:rPr lang="en-US"/>
               <a:t>Click to edit Master title style</a:t>
             </a:r>
             <a:endParaRPr lang="en-GB" dirty="0"/>
@@ -1198,7 +1198,7 @@
           </a:lstStyle>
           <a:p>
             <a:r>
-              <a:rPr lang="en-US" smtClean="0"/>
+              <a:rPr lang="en-US"/>
               <a:t>Click to edit Master title style</a:t>
             </a:r>
             <a:endParaRPr lang="en-GB" dirty="0"/>
@@ -1477,7 +1477,7 @@
           </a:lstStyle>
           <a:p>
             <a:r>
-              <a:rPr lang="en-US" smtClean="0"/>
+              <a:rPr lang="en-US"/>
               <a:t>Click to edit Master title style</a:t>
             </a:r>
             <a:endParaRPr lang="en-GB" dirty="0"/>
@@ -1756,7 +1756,7 @@
           </a:lstStyle>
           <a:p>
             <a:r>
-              <a:rPr lang="en-US" smtClean="0"/>
+              <a:rPr lang="en-US"/>
               <a:t>Click to edit Master title style</a:t>
             </a:r>
             <a:endParaRPr lang="en-GB" dirty="0"/>
@@ -2223,19 +2223,10 @@
                 <a:ea typeface="Calibri" panose="020F0502020204030204" pitchFamily="34" charset="0"/>
                 <a:cs typeface="Times New Roman" panose="02020603050405020304" pitchFamily="18" charset="0"/>
               </a:rPr>
-              <a:t>a. To use your own </a:t>
-            </a:r>
-            <a:r>
-              <a:rPr lang="en-GB" sz="900" i="0" u="none" noProof="0" dirty="0" smtClean="0">
-                <a:effectLst/>
-                <a:latin typeface="Calibri" panose="020F0502020204030204" pitchFamily="34" charset="0"/>
-                <a:ea typeface="Calibri" panose="020F0502020204030204" pitchFamily="34" charset="0"/>
-                <a:cs typeface="Times New Roman" panose="02020603050405020304" pitchFamily="18" charset="0"/>
-              </a:rPr>
-              <a:t>image</a:t>
-            </a:r>
-            <a:r>
-              <a:rPr lang="en-GB" sz="900" i="0" u="none" baseline="0" noProof="0" dirty="0" smtClean="0">
+              <a:t>a. To use your own image</a:t>
+            </a:r>
+            <a:r>
+              <a:rPr lang="en-GB" sz="900" i="0" u="none" baseline="0" noProof="0" dirty="0">
                 <a:effectLst/>
                 <a:latin typeface="Calibri" panose="020F0502020204030204" pitchFamily="34" charset="0"/>
                 <a:ea typeface="Calibri" panose="020F0502020204030204" pitchFamily="34" charset="0"/>
@@ -2244,22 +2235,13 @@
               <a:t> to the right</a:t>
             </a:r>
             <a:r>
-              <a:rPr lang="en-GB" sz="900" i="0" u="none" noProof="0" dirty="0" smtClean="0">
-                <a:effectLst/>
-                <a:latin typeface="Calibri" panose="020F0502020204030204" pitchFamily="34" charset="0"/>
-                <a:ea typeface="Calibri" panose="020F0502020204030204" pitchFamily="34" charset="0"/>
-                <a:cs typeface="Times New Roman" panose="02020603050405020304" pitchFamily="18" charset="0"/>
-              </a:rPr>
-              <a:t>, </a:t>
-            </a:r>
-            <a:r>
               <a:rPr lang="en-GB" sz="900" i="0" u="none" noProof="0" dirty="0">
                 <a:effectLst/>
                 <a:latin typeface="Calibri" panose="020F0502020204030204" pitchFamily="34" charset="0"/>
                 <a:ea typeface="Calibri" panose="020F0502020204030204" pitchFamily="34" charset="0"/>
                 <a:cs typeface="Times New Roman" panose="02020603050405020304" pitchFamily="18" charset="0"/>
               </a:rPr>
-              <a:t>click on the “Picture” icon in the placeholder and insert an image, which should not be too detailed. </a:t>
+              <a:t>, click on the “Picture” icon in the placeholder and insert an image, which should not be too detailed. </a:t>
             </a:r>
           </a:p>
           <a:p>
@@ -2301,61 +2283,7 @@
                 <a:ea typeface="Calibri" panose="020F0502020204030204" pitchFamily="34" charset="0"/>
                 <a:cs typeface="Times New Roman" panose="02020603050405020304" pitchFamily="18" charset="0"/>
               </a:rPr>
-              <a:t>c. To change the colour of the shape: click on the shape and select a different colour theme from “Shape </a:t>
-            </a:r>
-            <a:r>
-              <a:rPr lang="en-GB" sz="900" i="0" u="none" noProof="0" dirty="0" smtClean="0">
-                <a:effectLst/>
-                <a:latin typeface="Calibri" panose="020F0502020204030204" pitchFamily="34" charset="0"/>
-                <a:ea typeface="Calibri" panose="020F0502020204030204" pitchFamily="34" charset="0"/>
-                <a:cs typeface="Times New Roman" panose="02020603050405020304" pitchFamily="18" charset="0"/>
-              </a:rPr>
-              <a:t>fill</a:t>
-            </a:r>
-            <a:r>
-              <a:rPr lang="en-GB" sz="900" i="0" u="none" noProof="0" dirty="0">
-                <a:effectLst/>
-                <a:latin typeface="Calibri" panose="020F0502020204030204" pitchFamily="34" charset="0"/>
-                <a:ea typeface="Calibri" panose="020F0502020204030204" pitchFamily="34" charset="0"/>
-                <a:cs typeface="Times New Roman" panose="02020603050405020304" pitchFamily="18" charset="0"/>
-              </a:rPr>
-              <a:t>”. If </a:t>
-            </a:r>
-            <a:r>
-              <a:rPr lang="en-GB" sz="900" i="0" u="none" noProof="0" dirty="0" smtClean="0">
-                <a:effectLst/>
-                <a:latin typeface="Calibri" panose="020F0502020204030204" pitchFamily="34" charset="0"/>
-                <a:ea typeface="Calibri" panose="020F0502020204030204" pitchFamily="34" charset="0"/>
-                <a:cs typeface="Times New Roman" panose="02020603050405020304" pitchFamily="18" charset="0"/>
-              </a:rPr>
-              <a:t>it is impossible to click </a:t>
-            </a:r>
-            <a:r>
-              <a:rPr lang="en-GB" sz="900" i="0" u="none" noProof="0" dirty="0">
-                <a:effectLst/>
-                <a:latin typeface="Calibri" panose="020F0502020204030204" pitchFamily="34" charset="0"/>
-                <a:ea typeface="Calibri" panose="020F0502020204030204" pitchFamily="34" charset="0"/>
-                <a:cs typeface="Times New Roman" panose="02020603050405020304" pitchFamily="18" charset="0"/>
-              </a:rPr>
-              <a:t>on the shape, click on the image area and select “Send </a:t>
-            </a:r>
-            <a:r>
-              <a:rPr lang="en-GB" sz="900" i="0" u="none" noProof="0" dirty="0" smtClean="0">
-                <a:effectLst/>
-                <a:latin typeface="Calibri" panose="020F0502020204030204" pitchFamily="34" charset="0"/>
-                <a:ea typeface="Calibri" panose="020F0502020204030204" pitchFamily="34" charset="0"/>
-                <a:cs typeface="Times New Roman" panose="02020603050405020304" pitchFamily="18" charset="0"/>
-              </a:rPr>
-              <a:t>backward</a:t>
-            </a:r>
-            <a:r>
-              <a:rPr lang="en-GB" sz="900" i="0" u="none" noProof="0" dirty="0">
-                <a:effectLst/>
-                <a:latin typeface="Calibri" panose="020F0502020204030204" pitchFamily="34" charset="0"/>
-                <a:ea typeface="Calibri" panose="020F0502020204030204" pitchFamily="34" charset="0"/>
-                <a:cs typeface="Times New Roman" panose="02020603050405020304" pitchFamily="18" charset="0"/>
-              </a:rPr>
-              <a:t>”.</a:t>
+              <a:t>c. To change the colour of the shape: click on the shape and select a different colour theme from “Shape fill”. If it is impossible to click on the shape, click on the image area and select “Send backward”.</a:t>
             </a:r>
           </a:p>
         </p:txBody>
@@ -3252,41 +3180,25 @@
           <a:p>
             <a:r>
               <a:rPr lang="en-US" b="1" dirty="0"/>
-              <a:t>A newbie’s </a:t>
-            </a:r>
-            <a:r>
-              <a:rPr lang="en-US" b="1" dirty="0" smtClean="0"/>
-              <a:t>guide to the development of a new </a:t>
-            </a:r>
-            <a:r>
+              <a:t>A newbie’s guide to the development of a new function for RDBES</a:t>
+            </a:r>
+            <a:r>
+              <a:rPr lang="et-EE" b="1"/>
+              <a:t>core</a:t>
+            </a:r>
+            <a:r>
+              <a:rPr lang="en-US" b="1"/>
+              <a:t> </a:t>
+            </a:r>
+            <a:r>
+              <a:rPr lang="en-US" sz="3600" b="1" dirty="0"/>
+              <a:t>(and editing existing ones)</a:t>
+            </a:r>
+            <a:br>
               <a:rPr lang="en-US" b="1" dirty="0"/>
-              <a:t>function </a:t>
-            </a:r>
-            <a:r>
-              <a:rPr lang="en-US" b="1" dirty="0" smtClean="0"/>
-              <a:t>for </a:t>
-            </a:r>
-            <a:r>
-              <a:rPr lang="en-US" b="1" dirty="0" err="1" smtClean="0"/>
-              <a:t>icesRDBES</a:t>
-            </a:r>
-            <a:r>
-              <a:rPr lang="en-US" b="1" dirty="0" smtClean="0"/>
-              <a:t> </a:t>
-            </a:r>
-            <a:r>
-              <a:rPr lang="en-US" sz="3600" b="1" dirty="0" smtClean="0"/>
-              <a:t>(and editing existing ones)</a:t>
-            </a:r>
-            <a:r>
-              <a:rPr lang="en-US" b="1" dirty="0" smtClean="0"/>
-              <a:t/>
-            </a:r>
-            <a:br>
-              <a:rPr lang="en-US" b="1" dirty="0" smtClean="0"/>
             </a:br>
             <a:r>
-              <a:rPr lang="en-US" sz="1600" b="1" dirty="0" smtClean="0"/>
+              <a:rPr lang="en-US" sz="1600" b="1" dirty="0"/>
               <a:t>(with details for more experienced contributors at the end)</a:t>
             </a:r>
             <a:endParaRPr lang="en-GB" sz="1600" dirty="0"/>
@@ -3322,13 +3234,6 @@
   <p:clrMapOvr>
     <a:masterClrMapping/>
   </p:clrMapOvr>
-  <p:timing>
-    <p:tnLst>
-      <p:par>
-        <p:cTn id="1" dur="indefinite" restart="never" nodeType="tmRoot"/>
-      </p:par>
-    </p:tnLst>
-  </p:timing>
 </p:sld>
 </file>
 
@@ -3372,7 +3277,7 @@
           <a:lstStyle/>
           <a:p>
             <a:r>
-              <a:rPr lang="en-US" dirty="0" smtClean="0"/>
+              <a:rPr lang="en-US" dirty="0"/>
               <a:t>When you are done with your function</a:t>
             </a:r>
             <a:endParaRPr lang="sv-SE" dirty="0"/>
@@ -3406,23 +3311,23 @@
               <a:buAutoNum type="arabicPeriod" startAt="2"/>
             </a:pPr>
             <a:r>
-              <a:rPr lang="en-US" dirty="0" smtClean="0"/>
+              <a:rPr lang="en-US" dirty="0"/>
               <a:t>Install and run </a:t>
             </a:r>
             <a:r>
-              <a:rPr lang="en-US" dirty="0" err="1" smtClean="0"/>
+              <a:rPr lang="en-US" dirty="0" err="1"/>
               <a:t>styler</a:t>
             </a:r>
             <a:r>
-              <a:rPr lang="en-US" dirty="0" smtClean="0"/>
+              <a:rPr lang="en-US" dirty="0"/>
               <a:t> package in e.g., default mode (</a:t>
             </a:r>
             <a:r>
-              <a:rPr lang="en-US" dirty="0" err="1" smtClean="0"/>
+              <a:rPr lang="en-US" dirty="0" err="1"/>
               <a:t>tidyverse</a:t>
             </a:r>
             <a:r>
-              <a:rPr lang="en-US" dirty="0" smtClean="0"/>
+              <a:rPr lang="en-US" dirty="0"/>
               <a:t>)</a:t>
             </a:r>
           </a:p>
@@ -3477,7 +3382,7 @@
               <a:buFont typeface="+mj-lt"/>
               <a:buAutoNum type="arabicPeriod" startAt="2"/>
             </a:pPr>
-            <a:endParaRPr lang="en-US" dirty="0" smtClean="0"/>
+            <a:endParaRPr lang="en-US" dirty="0"/>
           </a:p>
           <a:p>
             <a:pPr marL="457200" indent="-457200">
@@ -3491,14 +3396,14 @@
               <a:buFont typeface="+mj-lt"/>
               <a:buAutoNum type="arabicPeriod" startAt="2"/>
             </a:pPr>
-            <a:endParaRPr lang="en-US" dirty="0" smtClean="0"/>
+            <a:endParaRPr lang="en-US" dirty="0"/>
           </a:p>
           <a:p>
             <a:pPr marL="457200" indent="-457200">
               <a:buFont typeface="+mj-lt"/>
               <a:buAutoNum type="arabicPeriod" startAt="2"/>
             </a:pPr>
-            <a:endParaRPr lang="en-US" dirty="0" smtClean="0"/>
+            <a:endParaRPr lang="en-US" dirty="0"/>
           </a:p>
           <a:p>
             <a:pPr marL="457200" indent="-457200">
@@ -3512,20 +3417,20 @@
               <a:buFont typeface="+mj-lt"/>
               <a:buAutoNum type="arabicPeriod" startAt="2"/>
             </a:pPr>
-            <a:endParaRPr lang="en-US" dirty="0" smtClean="0"/>
+            <a:endParaRPr lang="en-US" dirty="0"/>
           </a:p>
           <a:p>
             <a:pPr marL="0" indent="0">
               <a:buNone/>
             </a:pPr>
-            <a:endParaRPr lang="en-US" dirty="0" smtClean="0"/>
+            <a:endParaRPr lang="en-US" dirty="0"/>
           </a:p>
           <a:p>
             <a:pPr marL="457200" indent="-457200">
               <a:buFont typeface="+mj-lt"/>
               <a:buAutoNum type="arabicPeriod"/>
             </a:pPr>
-            <a:endParaRPr lang="en-US" dirty="0" smtClean="0"/>
+            <a:endParaRPr lang="en-US" dirty="0"/>
           </a:p>
           <a:p>
             <a:pPr marL="457200" indent="-457200">
@@ -3586,13 +3491,6 @@
       </p:transition>
     </mc:Fallback>
   </mc:AlternateContent>
-  <p:timing>
-    <p:tnLst>
-      <p:par>
-        <p:cTn id="1" dur="indefinite" restart="never" nodeType="tmRoot"/>
-      </p:par>
-    </p:tnLst>
-  </p:timing>
 </p:sld>
 </file>
 
@@ -3636,7 +3534,7 @@
           <a:lstStyle/>
           <a:p>
             <a:r>
-              <a:rPr lang="en-US" dirty="0" smtClean="0"/>
+              <a:rPr lang="en-US" dirty="0"/>
               <a:t>When you are done with your function</a:t>
             </a:r>
             <a:endParaRPr lang="sv-SE" dirty="0"/>
@@ -3670,34 +3568,30 @@
               <a:buAutoNum type="arabicPeriod" startAt="3"/>
             </a:pPr>
             <a:r>
-              <a:rPr lang="en-US" dirty="0" smtClean="0"/>
+              <a:rPr lang="en-US" dirty="0"/>
               <a:t>Install and run </a:t>
             </a:r>
             <a:r>
-              <a:rPr lang="en-US" dirty="0" err="1" smtClean="0"/>
+              <a:rPr lang="en-US" dirty="0" err="1"/>
               <a:t>lintr</a:t>
             </a:r>
             <a:r>
-              <a:rPr lang="en-US" dirty="0" smtClean="0"/>
+              <a:rPr lang="en-US" dirty="0"/>
               <a:t> package, solving the main issues flagged</a:t>
             </a:r>
           </a:p>
           <a:p>
             <a:pPr marL="600075" lvl="1" indent="-257175"/>
             <a:r>
-              <a:rPr lang="en-US" dirty="0" smtClean="0"/>
+              <a:rPr lang="en-US" dirty="0"/>
               <a:t>This is a tool to help identify and remove problems in your code – in particular we are using it to identify any remaining style problems.</a:t>
             </a:r>
           </a:p>
           <a:p>
             <a:pPr marL="600075" lvl="1" indent="-257175"/>
             <a:r>
-              <a:rPr lang="en-US" dirty="0" smtClean="0"/>
-              <a:t>Run </a:t>
-            </a:r>
-            <a:r>
-              <a:rPr lang="en-US" dirty="0"/>
-              <a:t>the following command to identify problems in a file called </a:t>
+              <a:rPr lang="en-US" dirty="0"/>
+              <a:t>Run the following command to identify problems in a file called </a:t>
             </a:r>
             <a:r>
               <a:rPr lang="en-US" dirty="0" err="1">
@@ -3783,7 +3677,7 @@
               <a:t>camelCase</a:t>
             </a:r>
             <a:r>
-              <a:rPr lang="en-US" dirty="0" smtClean="0"/>
+              <a:rPr lang="en-US" dirty="0"/>
               <a:t>")))</a:t>
             </a:r>
           </a:p>
@@ -3807,22 +3701,14 @@
             </a:r>
             <a:r>
               <a:rPr lang="en-US" dirty="0"/>
-              <a:t> you will see a “Markers” pane open to show any </a:t>
-            </a:r>
-            <a:r>
-              <a:rPr lang="en-US" dirty="0" smtClean="0"/>
-              <a:t>problems</a:t>
+              <a:t> you will see a “Markers” pane open to show any problems</a:t>
             </a:r>
           </a:p>
           <a:p>
             <a:pPr marL="780075" lvl="2" indent="-257175"/>
             <a:r>
-              <a:rPr lang="en-US" dirty="0" smtClean="0"/>
-              <a:t>If </a:t>
-            </a:r>
-            <a:r>
-              <a:rPr lang="en-US" dirty="0"/>
-              <a:t>you have a warning about </a:t>
+              <a:rPr lang="en-US" dirty="0"/>
+              <a:t>If you have a warning about </a:t>
             </a:r>
             <a:r>
               <a:rPr lang="en-US" dirty="0" err="1"/>
@@ -3830,19 +3716,7 @@
             </a:r>
             <a:r>
               <a:rPr lang="en-US" dirty="0"/>
-              <a:t> </a:t>
-            </a:r>
-            <a:r>
-              <a:rPr lang="en-US" dirty="0" smtClean="0"/>
-              <a:t>complexity: </a:t>
-            </a:r>
-            <a:r>
-              <a:rPr lang="en-US" dirty="0" smtClean="0">
-                <a:solidFill>
-                  <a:schemeClr val="tx1"/>
-                </a:solidFill>
-              </a:rPr>
-              <a:t>consider splitting </a:t>
+              <a:t> complexity: </a:t>
             </a:r>
             <a:r>
               <a:rPr lang="en-US" dirty="0">
@@ -3850,44 +3724,15 @@
                   <a:schemeClr val="tx1"/>
                 </a:solidFill>
               </a:rPr>
-              <a:t>up the function into smaller parts, </a:t>
-            </a:r>
-            <a:r>
-              <a:rPr lang="en-US" dirty="0" smtClean="0">
-                <a:solidFill>
-                  <a:schemeClr val="tx1"/>
-                </a:solidFill>
-              </a:rPr>
-              <a:t>(but don't</a:t>
-            </a:r>
-            <a:r>
-              <a:rPr lang="en-US" dirty="0">
-                <a:solidFill>
-                  <a:schemeClr val="tx1"/>
-                </a:solidFill>
-              </a:rPr>
-              <a:t> </a:t>
-            </a:r>
-            <a:r>
-              <a:rPr lang="en-US" dirty="0" smtClean="0">
-                <a:solidFill>
-                  <a:schemeClr val="tx1"/>
-                </a:solidFill>
-              </a:rPr>
-              <a:t>worry too much if that looks difficult – can be done later)</a:t>
-            </a:r>
-            <a:endParaRPr lang="en-US" dirty="0">
-              <a:solidFill>
-                <a:schemeClr val="tx1"/>
-              </a:solidFill>
-            </a:endParaRPr>
+              <a:t>consider splitting up the function into smaller parts, (but don't worry too much if that looks difficult – can be done later)</a:t>
+            </a:r>
           </a:p>
           <a:p>
             <a:pPr marL="457200" indent="-457200">
               <a:buFont typeface="+mj-lt"/>
               <a:buAutoNum type="arabicPeriod" startAt="3"/>
             </a:pPr>
-            <a:endParaRPr lang="en-US" dirty="0" smtClean="0"/>
+            <a:endParaRPr lang="en-US" dirty="0"/>
           </a:p>
           <a:p>
             <a:pPr marL="457200" indent="-457200">
@@ -3901,14 +3746,14 @@
               <a:buFont typeface="+mj-lt"/>
               <a:buAutoNum type="arabicPeriod" startAt="3"/>
             </a:pPr>
-            <a:endParaRPr lang="en-US" dirty="0" smtClean="0"/>
+            <a:endParaRPr lang="en-US" dirty="0"/>
           </a:p>
           <a:p>
             <a:pPr marL="457200" indent="-457200">
               <a:buFont typeface="+mj-lt"/>
               <a:buAutoNum type="arabicPeriod" startAt="3"/>
             </a:pPr>
-            <a:endParaRPr lang="en-US" dirty="0" smtClean="0"/>
+            <a:endParaRPr lang="en-US" dirty="0"/>
           </a:p>
           <a:p>
             <a:pPr marL="457200" indent="-457200">
@@ -3922,20 +3767,20 @@
               <a:buFont typeface="+mj-lt"/>
               <a:buAutoNum type="arabicPeriod" startAt="3"/>
             </a:pPr>
-            <a:endParaRPr lang="en-US" dirty="0" smtClean="0"/>
+            <a:endParaRPr lang="en-US" dirty="0"/>
           </a:p>
           <a:p>
             <a:pPr marL="0" indent="0">
               <a:buNone/>
             </a:pPr>
-            <a:endParaRPr lang="en-US" dirty="0" smtClean="0"/>
+            <a:endParaRPr lang="en-US" dirty="0"/>
           </a:p>
           <a:p>
             <a:pPr marL="457200" indent="-457200">
               <a:buFont typeface="+mj-lt"/>
               <a:buAutoNum type="arabicPeriod"/>
             </a:pPr>
-            <a:endParaRPr lang="en-US" dirty="0" smtClean="0"/>
+            <a:endParaRPr lang="en-US" dirty="0"/>
           </a:p>
           <a:p>
             <a:pPr marL="457200" indent="-457200">
@@ -3990,13 +3835,6 @@
       </p:transition>
     </mc:Fallback>
   </mc:AlternateContent>
-  <p:timing>
-    <p:tnLst>
-      <p:par>
-        <p:cTn id="1" dur="indefinite" restart="never" nodeType="tmRoot"/>
-      </p:par>
-    </p:tnLst>
-  </p:timing>
 </p:sld>
 </file>
 
@@ -4040,7 +3878,7 @@
           <a:lstStyle/>
           <a:p>
             <a:r>
-              <a:rPr lang="en-US" dirty="0" smtClean="0"/>
+              <a:rPr lang="en-US" dirty="0"/>
               <a:t>When you are done with your function</a:t>
             </a:r>
             <a:endParaRPr lang="sv-SE" dirty="0"/>
@@ -4077,14 +3915,14 @@
               <a:buAutoNum type="arabicPeriod" startAt="4"/>
             </a:pPr>
             <a:r>
-              <a:rPr lang="en-US" dirty="0" smtClean="0"/>
+              <a:rPr lang="en-US" dirty="0"/>
               <a:t>Commit your code, data and </a:t>
             </a:r>
             <a:r>
-              <a:rPr lang="en-GB" dirty="0" smtClean="0"/>
+              <a:rPr lang="en-GB" dirty="0"/>
               <a:t>example/vignettes</a:t>
             </a:r>
-            <a:endParaRPr lang="en-US" dirty="0" smtClean="0"/>
+            <a:endParaRPr lang="en-US" dirty="0"/>
           </a:p>
           <a:p>
             <a:pPr marL="457200" indent="-457200">
@@ -4095,15 +3933,15 @@
               <a:buAutoNum type="arabicPeriod" startAt="4"/>
             </a:pPr>
             <a:r>
-              <a:rPr lang="en-US" dirty="0" smtClean="0"/>
+              <a:rPr lang="en-US" dirty="0"/>
               <a:t>Inform WGRDBES-EST chairs so your </a:t>
             </a:r>
             <a:r>
-              <a:rPr lang="en-US" dirty="0" err="1" smtClean="0"/>
+              <a:rPr lang="en-US" dirty="0" err="1"/>
               <a:t>example_script&amp;function</a:t>
             </a:r>
             <a:r>
-              <a:rPr lang="en-US" dirty="0" smtClean="0"/>
+              <a:rPr lang="en-US" dirty="0"/>
               <a:t> are highlighted for discussion at next meeting; </a:t>
             </a:r>
           </a:p>
@@ -4116,16 +3954,8 @@
               <a:buAutoNum type="arabicPeriod" startAt="4"/>
             </a:pPr>
             <a:r>
-              <a:rPr lang="en-US" dirty="0" smtClean="0"/>
-              <a:t>Leave a comment in </a:t>
-            </a:r>
-            <a:r>
-              <a:rPr lang="en-US" dirty="0"/>
-              <a:t>your issue </a:t>
-            </a:r>
-            <a:r>
-              <a:rPr lang="en-US" dirty="0" smtClean="0"/>
-              <a:t>detailing where the code is (and other developments you consider important to flag), and label it as “in test” so others know they can test it.</a:t>
+              <a:rPr lang="en-US" dirty="0"/>
+              <a:t>Leave a comment in your issue detailing where the code is (and other developments you consider important to flag), and label it as “in test” so others know they can test it.</a:t>
             </a:r>
           </a:p>
           <a:p>
@@ -4137,7 +3967,7 @@
               <a:buAutoNum type="arabicPeriod" startAt="4"/>
             </a:pPr>
             <a:r>
-              <a:rPr lang="en-US" dirty="0" smtClean="0"/>
+              <a:rPr lang="en-US" dirty="0"/>
               <a:t>After your code is tested you will receive support from maintainers in the final preparation of your code for inclusion in the package</a:t>
             </a:r>
           </a:p>
@@ -4159,7 +3989,7 @@
               <a:buFont typeface="+mj-lt"/>
               <a:buAutoNum type="arabicPeriod" startAt="4"/>
             </a:pPr>
-            <a:endParaRPr lang="en-US" dirty="0" smtClean="0"/>
+            <a:endParaRPr lang="en-US" dirty="0"/>
           </a:p>
           <a:p>
             <a:pPr marL="600075" lvl="1" indent="-257175">
@@ -4177,7 +4007,7 @@
               <a:buFont typeface="+mj-lt"/>
               <a:buAutoNum type="arabicPeriod" startAt="4"/>
             </a:pPr>
-            <a:endParaRPr lang="en-US" dirty="0" smtClean="0"/>
+            <a:endParaRPr lang="en-US" dirty="0"/>
           </a:p>
           <a:p>
             <a:pPr marL="457200" indent="-457200">
@@ -4197,7 +4027,7 @@
               <a:buFont typeface="+mj-lt"/>
               <a:buAutoNum type="arabicPeriod" startAt="4"/>
             </a:pPr>
-            <a:endParaRPr lang="en-US" dirty="0" smtClean="0"/>
+            <a:endParaRPr lang="en-US" dirty="0"/>
           </a:p>
           <a:p>
             <a:pPr marL="457200" indent="-457200">
@@ -4207,7 +4037,7 @@
               <a:buFont typeface="+mj-lt"/>
               <a:buAutoNum type="arabicPeriod" startAt="4"/>
             </a:pPr>
-            <a:endParaRPr lang="en-US" dirty="0" smtClean="0"/>
+            <a:endParaRPr lang="en-US" dirty="0"/>
           </a:p>
           <a:p>
             <a:pPr marL="457200" indent="-457200">
@@ -4227,7 +4057,7 @@
               <a:buFont typeface="+mj-lt"/>
               <a:buAutoNum type="arabicPeriod" startAt="4"/>
             </a:pPr>
-            <a:endParaRPr lang="en-US" dirty="0" smtClean="0"/>
+            <a:endParaRPr lang="en-US" dirty="0"/>
           </a:p>
           <a:p>
             <a:pPr marL="0" indent="0">
@@ -4236,7 +4066,7 @@
               </a:lnSpc>
               <a:buNone/>
             </a:pPr>
-            <a:endParaRPr lang="en-US" dirty="0" smtClean="0"/>
+            <a:endParaRPr lang="en-US" dirty="0"/>
           </a:p>
           <a:p>
             <a:pPr marL="457200" indent="-457200">
@@ -4246,7 +4076,7 @@
               <a:buFont typeface="+mj-lt"/>
               <a:buAutoNum type="arabicPeriod"/>
             </a:pPr>
-            <a:endParaRPr lang="en-US" dirty="0" smtClean="0"/>
+            <a:endParaRPr lang="en-US" dirty="0"/>
           </a:p>
           <a:p>
             <a:pPr marL="457200" indent="-457200">
@@ -4474,74 +4304,74 @@
               <a:buFont typeface="+mj-lt"/>
               <a:buAutoNum type="arabicPeriod" startAt="3"/>
             </a:pPr>
-            <a:endParaRPr lang="en-US" dirty="0" smtClean="0"/>
+            <a:endParaRPr lang="en-US" dirty="0"/>
           </a:p>
           <a:p>
             <a:pPr marL="457200" indent="-457200">
               <a:buFont typeface="+mj-lt"/>
               <a:buAutoNum type="arabicPeriod" startAt="3"/>
             </a:pPr>
-            <a:endParaRPr lang="en-US" dirty="0" smtClean="0"/>
+            <a:endParaRPr lang="en-US" dirty="0"/>
           </a:p>
           <a:p>
             <a:pPr marL="600075" lvl="1" indent="-257175"/>
-            <a:endParaRPr lang="en-US" dirty="0" smtClean="0"/>
+            <a:endParaRPr lang="en-US" dirty="0"/>
           </a:p>
           <a:p>
             <a:pPr marL="457200" indent="-457200">
               <a:buFont typeface="+mj-lt"/>
               <a:buAutoNum type="arabicPeriod" startAt="3"/>
             </a:pPr>
-            <a:endParaRPr lang="en-US" dirty="0" smtClean="0"/>
+            <a:endParaRPr lang="en-US" dirty="0"/>
           </a:p>
           <a:p>
             <a:pPr marL="457200" indent="-457200">
               <a:buFont typeface="+mj-lt"/>
               <a:buAutoNum type="arabicPeriod" startAt="3"/>
             </a:pPr>
-            <a:endParaRPr lang="en-US" dirty="0" smtClean="0"/>
+            <a:endParaRPr lang="en-US" dirty="0"/>
           </a:p>
           <a:p>
             <a:pPr marL="457200" indent="-457200">
               <a:buFont typeface="+mj-lt"/>
               <a:buAutoNum type="arabicPeriod" startAt="3"/>
             </a:pPr>
-            <a:endParaRPr lang="en-US" dirty="0" smtClean="0"/>
+            <a:endParaRPr lang="en-US" dirty="0"/>
           </a:p>
           <a:p>
             <a:pPr marL="457200" indent="-457200">
               <a:buFont typeface="+mj-lt"/>
               <a:buAutoNum type="arabicPeriod" startAt="3"/>
             </a:pPr>
-            <a:endParaRPr lang="en-US" dirty="0" smtClean="0"/>
+            <a:endParaRPr lang="en-US" dirty="0"/>
           </a:p>
           <a:p>
             <a:pPr marL="457200" indent="-457200">
               <a:buFont typeface="+mj-lt"/>
               <a:buAutoNum type="arabicPeriod" startAt="3"/>
             </a:pPr>
-            <a:endParaRPr lang="en-US" dirty="0" smtClean="0"/>
+            <a:endParaRPr lang="en-US" dirty="0"/>
           </a:p>
           <a:p>
             <a:pPr marL="457200" indent="-457200">
               <a:buFont typeface="+mj-lt"/>
               <a:buAutoNum type="arabicPeriod" startAt="3"/>
             </a:pPr>
-            <a:endParaRPr lang="en-US" dirty="0" smtClean="0"/>
+            <a:endParaRPr lang="en-US" dirty="0"/>
           </a:p>
           <a:p>
             <a:pPr marL="0" indent="0">
               <a:buFont typeface="Arial" panose="020B0604020202020204" pitchFamily="34" charset="0"/>
               <a:buNone/>
             </a:pPr>
-            <a:endParaRPr lang="en-US" dirty="0" smtClean="0"/>
+            <a:endParaRPr lang="en-US" dirty="0"/>
           </a:p>
           <a:p>
             <a:pPr marL="457200" indent="-457200">
               <a:buFont typeface="+mj-lt"/>
               <a:buAutoNum type="arabicPeriod"/>
             </a:pPr>
-            <a:endParaRPr lang="en-US" dirty="0" smtClean="0"/>
+            <a:endParaRPr lang="en-US" dirty="0"/>
           </a:p>
           <a:p>
             <a:pPr marL="457200" indent="-457200">
@@ -4574,13 +4404,6 @@
       </p:transition>
     </mc:Fallback>
   </mc:AlternateContent>
-  <p:timing>
-    <p:tnLst>
-      <p:par>
-        <p:cTn id="1" dur="indefinite" restart="never" nodeType="tmRoot"/>
-      </p:par>
-    </p:tnLst>
-  </p:timing>
 </p:sld>
 </file>
 
@@ -4624,7 +4447,7 @@
           <a:lstStyle/>
           <a:p>
             <a:r>
-              <a:rPr lang="en-US" dirty="0" smtClean="0"/>
+              <a:rPr lang="en-US" dirty="0"/>
               <a:t>If you are a more experienced contributor</a:t>
             </a:r>
             <a:endParaRPr lang="sv-SE" dirty="0"/>
@@ -4845,74 +4668,74 @@
               <a:buFont typeface="+mj-lt"/>
               <a:buAutoNum type="arabicPeriod" startAt="3"/>
             </a:pPr>
-            <a:endParaRPr lang="en-US" dirty="0" smtClean="0"/>
+            <a:endParaRPr lang="en-US" dirty="0"/>
           </a:p>
           <a:p>
             <a:pPr marL="457200" indent="-457200">
               <a:buFont typeface="+mj-lt"/>
               <a:buAutoNum type="arabicPeriod" startAt="3"/>
             </a:pPr>
-            <a:endParaRPr lang="en-US" dirty="0" smtClean="0"/>
+            <a:endParaRPr lang="en-US" dirty="0"/>
           </a:p>
           <a:p>
             <a:pPr marL="600075" lvl="1" indent="-257175"/>
-            <a:endParaRPr lang="en-US" dirty="0" smtClean="0"/>
+            <a:endParaRPr lang="en-US" dirty="0"/>
           </a:p>
           <a:p>
             <a:pPr marL="457200" indent="-457200">
               <a:buFont typeface="+mj-lt"/>
               <a:buAutoNum type="arabicPeriod" startAt="3"/>
             </a:pPr>
-            <a:endParaRPr lang="en-US" dirty="0" smtClean="0"/>
+            <a:endParaRPr lang="en-US" dirty="0"/>
           </a:p>
           <a:p>
             <a:pPr marL="457200" indent="-457200">
               <a:buFont typeface="+mj-lt"/>
               <a:buAutoNum type="arabicPeriod" startAt="3"/>
             </a:pPr>
-            <a:endParaRPr lang="en-US" dirty="0" smtClean="0"/>
+            <a:endParaRPr lang="en-US" dirty="0"/>
           </a:p>
           <a:p>
             <a:pPr marL="457200" indent="-457200">
               <a:buFont typeface="+mj-lt"/>
               <a:buAutoNum type="arabicPeriod" startAt="3"/>
             </a:pPr>
-            <a:endParaRPr lang="en-US" dirty="0" smtClean="0"/>
+            <a:endParaRPr lang="en-US" dirty="0"/>
           </a:p>
           <a:p>
             <a:pPr marL="457200" indent="-457200">
               <a:buFont typeface="+mj-lt"/>
               <a:buAutoNum type="arabicPeriod" startAt="3"/>
             </a:pPr>
-            <a:endParaRPr lang="en-US" dirty="0" smtClean="0"/>
+            <a:endParaRPr lang="en-US" dirty="0"/>
           </a:p>
           <a:p>
             <a:pPr marL="457200" indent="-457200">
               <a:buFont typeface="+mj-lt"/>
               <a:buAutoNum type="arabicPeriod" startAt="3"/>
             </a:pPr>
-            <a:endParaRPr lang="en-US" dirty="0" smtClean="0"/>
+            <a:endParaRPr lang="en-US" dirty="0"/>
           </a:p>
           <a:p>
             <a:pPr marL="457200" indent="-457200">
               <a:buFont typeface="+mj-lt"/>
               <a:buAutoNum type="arabicPeriod" startAt="3"/>
             </a:pPr>
-            <a:endParaRPr lang="en-US" dirty="0" smtClean="0"/>
+            <a:endParaRPr lang="en-US" dirty="0"/>
           </a:p>
           <a:p>
             <a:pPr marL="0" indent="0">
               <a:buFont typeface="Arial" panose="020B0604020202020204" pitchFamily="34" charset="0"/>
               <a:buNone/>
             </a:pPr>
-            <a:endParaRPr lang="en-US" dirty="0" smtClean="0"/>
+            <a:endParaRPr lang="en-US" dirty="0"/>
           </a:p>
           <a:p>
             <a:pPr marL="457200" indent="-457200">
               <a:buFont typeface="+mj-lt"/>
               <a:buAutoNum type="arabicPeriod"/>
             </a:pPr>
-            <a:endParaRPr lang="en-US" dirty="0" smtClean="0"/>
+            <a:endParaRPr lang="en-US" dirty="0"/>
           </a:p>
           <a:p>
             <a:pPr marL="457200" indent="-457200">
@@ -4954,12 +4777,8 @@
           <a:p>
             <a:pPr marL="273050" indent="-273050"/>
             <a:r>
-              <a:rPr lang="en-US" sz="1400" dirty="0" smtClean="0"/>
-              <a:t>There </a:t>
-            </a:r>
-            <a:r>
               <a:rPr lang="en-US" sz="1400" dirty="0"/>
-              <a:t>are two branches within the repo: master and dev</a:t>
+              <a:t>There are two branches within the repo: master and dev</a:t>
             </a:r>
           </a:p>
           <a:p>
@@ -4982,21 +4801,12 @@
               <a:rPr lang="en-US" sz="1400" dirty="0"/>
               <a:t>A pull request needs to be created when we want to merge the development branch into the master branch – the maintainers will need to approve the pull request </a:t>
             </a:r>
-            <a:endParaRPr lang="en-US" sz="1400" dirty="0" smtClean="0"/>
           </a:p>
           <a:p>
             <a:pPr marL="800100" lvl="1" indent="-342900"/>
             <a:r>
               <a:rPr lang="en-US" sz="1400" dirty="0"/>
-              <a:t>Release labels </a:t>
-            </a:r>
-            <a:r>
-              <a:rPr lang="en-US" sz="1400" dirty="0" smtClean="0"/>
-              <a:t>will be </a:t>
-            </a:r>
-            <a:r>
-              <a:rPr lang="en-US" sz="1400" dirty="0"/>
-              <a:t>applied to the master branch to keep track of releases </a:t>
+              <a:t>Release labels will be applied to the master branch to keep track of releases </a:t>
             </a:r>
           </a:p>
           <a:p>
@@ -5007,21 +4817,8 @@
             </a:r>
             <a:r>
               <a:rPr lang="en-US" sz="1400" dirty="0"/>
-              <a:t>– this can be to point out a bug in existing code, improve existing functions, or describe new functions that are required.  The proposed changes can then be discussed and agreed with the maintainers and other relevant people </a:t>
-            </a:r>
-            <a:r>
-              <a:rPr lang="en-US" sz="1400" dirty="0" smtClean="0"/>
-              <a:t>(there are regular online meetings) – </a:t>
-            </a:r>
-            <a:r>
-              <a:rPr lang="en-US" sz="1400" dirty="0"/>
-              <a:t>this should also act as peer-review system for the statistical content of the proposed </a:t>
-            </a:r>
-            <a:r>
-              <a:rPr lang="en-US" sz="1400" dirty="0" smtClean="0"/>
-              <a:t>development</a:t>
-            </a:r>
-            <a:endParaRPr lang="en-US" sz="1400" dirty="0"/>
+              <a:t>– this can be to point out a bug in existing code, improve existing functions, or describe new functions that are required.  The proposed changes can then be discussed and agreed with the maintainers and other relevant people (there are regular online meetings) – this should also act as peer-review system for the statistical content of the proposed development</a:t>
+            </a:r>
           </a:p>
           <a:p>
             <a:pPr marL="273050" indent="-273050"/>
@@ -5040,7 +4837,6 @@
               <a:rPr lang="en-US" sz="1400" dirty="0"/>
               <a:t>Periodically the maintainers will update the package in CRAN. If people want/need the latest version of the package it can always be installed directly from GitHub. </a:t>
             </a:r>
-            <a:endParaRPr lang="en-US" sz="1400" dirty="0" smtClean="0"/>
           </a:p>
           <a:p>
             <a:pPr marL="273050" indent="-273050">
@@ -5049,7 +4845,7 @@
               </a:lnSpc>
             </a:pPr>
             <a:r>
-              <a:rPr lang="en-US" sz="1400" dirty="0" smtClean="0"/>
+              <a:rPr lang="en-US" sz="1400" dirty="0"/>
               <a:t>A </a:t>
             </a:r>
             <a:r>
@@ -5058,31 +4854,30 @@
                   <a:schemeClr val="tx1"/>
                 </a:solidFill>
               </a:rPr>
-              <a:t>small group of maintainers will need to </a:t>
-            </a:r>
-            <a:r>
-              <a:rPr lang="en-US" sz="1400" dirty="0" smtClean="0">
-                <a:solidFill>
-                  <a:schemeClr val="tx1"/>
-                </a:solidFill>
-              </a:rPr>
-              <a:t>volunteer. The group includes someone </a:t>
-            </a:r>
+              <a:t>small group of maintainers will need to volunteer. The group includes someone from the ICES Secretariat. We are actively looking for maintainers. You are welcome to flag your interest.</a:t>
+            </a:r>
+          </a:p>
+          <a:p>
+            <a:pPr marL="273050" indent="-273050">
+              <a:lnSpc>
+                <a:spcPct val="100000"/>
+              </a:lnSpc>
+            </a:pPr>
             <a:r>
               <a:rPr lang="en-US" sz="1400" dirty="0">
                 <a:solidFill>
                   <a:schemeClr val="tx1"/>
                 </a:solidFill>
               </a:rPr>
-              <a:t>from the </a:t>
-            </a:r>
-            <a:r>
-              <a:rPr lang="en-US" sz="1400" dirty="0" smtClean="0">
+              <a:t>A “lint” tool is configured that will compare committed code to a defined style and warn if there any problems. For now it is not activated – just run </a:t>
+            </a:r>
+            <a:r>
+              <a:rPr lang="en-US" sz="1400" dirty="0" err="1">
                 <a:solidFill>
                   <a:schemeClr val="tx1"/>
                 </a:solidFill>
               </a:rPr>
-              <a:t>ICES Secretariat</a:t>
+              <a:t>styler</a:t>
             </a:r>
             <a:r>
               <a:rPr lang="en-US" sz="1400" dirty="0">
@@ -5090,15 +4885,15 @@
                   <a:schemeClr val="tx1"/>
                 </a:solidFill>
               </a:rPr>
-              <a:t>. </a:t>
-            </a:r>
-            <a:r>
-              <a:rPr lang="en-US" sz="1400" dirty="0" smtClean="0">
+              <a:t> (default: </a:t>
+            </a:r>
+            <a:r>
+              <a:rPr lang="en-US" sz="1400" dirty="0" err="1">
                 <a:solidFill>
                   <a:schemeClr val="tx1"/>
                 </a:solidFill>
               </a:rPr>
-              <a:t>We are actively looking for maintainers. You </a:t>
+              <a:t>tidyverse</a:t>
             </a:r>
             <a:r>
               <a:rPr lang="en-US" sz="1400" dirty="0">
@@ -5106,97 +4901,10 @@
                   <a:schemeClr val="tx1"/>
                 </a:solidFill>
               </a:rPr>
-              <a:t>are welcome to flag your </a:t>
-            </a:r>
-            <a:r>
-              <a:rPr lang="en-US" sz="1400" dirty="0" smtClean="0">
-                <a:solidFill>
-                  <a:schemeClr val="tx1"/>
-                </a:solidFill>
-              </a:rPr>
-              <a:t>interest.</a:t>
-            </a:r>
-          </a:p>
-          <a:p>
-            <a:pPr marL="273050" indent="-273050">
-              <a:lnSpc>
-                <a:spcPct val="100000"/>
-              </a:lnSpc>
-            </a:pPr>
-            <a:r>
-              <a:rPr lang="en-US" sz="1400" dirty="0" smtClean="0">
-                <a:solidFill>
-                  <a:schemeClr val="tx1"/>
-                </a:solidFill>
-              </a:rPr>
-              <a:t>A </a:t>
-            </a:r>
-            <a:r>
-              <a:rPr lang="en-US" sz="1400" dirty="0">
-                <a:solidFill>
-                  <a:schemeClr val="tx1"/>
-                </a:solidFill>
-              </a:rPr>
-              <a:t>“lint” tool is configured that will compare </a:t>
-            </a:r>
-            <a:r>
-              <a:rPr lang="en-US" sz="1400" dirty="0" smtClean="0">
-                <a:solidFill>
-                  <a:schemeClr val="tx1"/>
-                </a:solidFill>
-              </a:rPr>
-              <a:t>committed </a:t>
-            </a:r>
-            <a:r>
-              <a:rPr lang="en-US" sz="1400" dirty="0">
-                <a:solidFill>
-                  <a:schemeClr val="tx1"/>
-                </a:solidFill>
-              </a:rPr>
-              <a:t>code to a defined style and warn if there any problems. For now it is not </a:t>
-            </a:r>
-            <a:r>
-              <a:rPr lang="en-US" sz="1400" dirty="0" smtClean="0">
-                <a:solidFill>
-                  <a:schemeClr val="tx1"/>
-                </a:solidFill>
-              </a:rPr>
-              <a:t>activated – just run </a:t>
-            </a:r>
-            <a:r>
-              <a:rPr lang="en-US" sz="1400" dirty="0" err="1" smtClean="0">
-                <a:solidFill>
-                  <a:schemeClr val="tx1"/>
-                </a:solidFill>
-              </a:rPr>
-              <a:t>styler</a:t>
-            </a:r>
-            <a:r>
-              <a:rPr lang="en-US" sz="1400" dirty="0" smtClean="0">
-                <a:solidFill>
-                  <a:schemeClr val="tx1"/>
-                </a:solidFill>
-              </a:rPr>
-              <a:t> (default: </a:t>
-            </a:r>
-            <a:r>
-              <a:rPr lang="en-US" sz="1400" dirty="0" err="1" smtClean="0">
-                <a:solidFill>
-                  <a:schemeClr val="tx1"/>
-                </a:solidFill>
-              </a:rPr>
-              <a:t>tidyverse</a:t>
-            </a:r>
-            <a:r>
-              <a:rPr lang="en-US" sz="1400" dirty="0" smtClean="0">
-                <a:solidFill>
-                  <a:schemeClr val="tx1"/>
-                </a:solidFill>
-              </a:rPr>
               <a:t>) and </a:t>
             </a:r>
             <a:r>
-              <a:rPr lang="en-US" sz="1400" dirty="0" err="1" smtClean="0"/>
+              <a:rPr lang="en-US" sz="1400" dirty="0" err="1"/>
               <a:t>lintr</a:t>
             </a:r>
             <a:r>
@@ -5315,13 +5023,6 @@
       </p:transition>
     </mc:Fallback>
   </mc:AlternateContent>
-  <p:timing>
-    <p:tnLst>
-      <p:par>
-        <p:cTn id="1" dur="indefinite" restart="never" nodeType="tmRoot"/>
-      </p:par>
-    </p:tnLst>
-  </p:timing>
 </p:sld>
 </file>
 
@@ -5365,7 +5066,7 @@
           <a:lstStyle/>
           <a:p>
             <a:r>
-              <a:rPr lang="en-US" dirty="0" smtClean="0"/>
+              <a:rPr lang="en-US" dirty="0"/>
               <a:t>If you are a more experienced contributor</a:t>
             </a:r>
             <a:endParaRPr lang="sv-SE" dirty="0"/>
@@ -5586,74 +5287,74 @@
               <a:buFont typeface="+mj-lt"/>
               <a:buAutoNum type="arabicPeriod" startAt="3"/>
             </a:pPr>
-            <a:endParaRPr lang="en-US" dirty="0" smtClean="0"/>
+            <a:endParaRPr lang="en-US" dirty="0"/>
           </a:p>
           <a:p>
             <a:pPr marL="457200" indent="-457200">
               <a:buFont typeface="+mj-lt"/>
               <a:buAutoNum type="arabicPeriod" startAt="3"/>
             </a:pPr>
-            <a:endParaRPr lang="en-US" dirty="0" smtClean="0"/>
+            <a:endParaRPr lang="en-US" dirty="0"/>
           </a:p>
           <a:p>
             <a:pPr marL="600075" lvl="1" indent="-257175"/>
-            <a:endParaRPr lang="en-US" dirty="0" smtClean="0"/>
+            <a:endParaRPr lang="en-US" dirty="0"/>
           </a:p>
           <a:p>
             <a:pPr marL="457200" indent="-457200">
               <a:buFont typeface="+mj-lt"/>
               <a:buAutoNum type="arabicPeriod" startAt="3"/>
             </a:pPr>
-            <a:endParaRPr lang="en-US" dirty="0" smtClean="0"/>
+            <a:endParaRPr lang="en-US" dirty="0"/>
           </a:p>
           <a:p>
             <a:pPr marL="457200" indent="-457200">
               <a:buFont typeface="+mj-lt"/>
               <a:buAutoNum type="arabicPeriod" startAt="3"/>
             </a:pPr>
-            <a:endParaRPr lang="en-US" dirty="0" smtClean="0"/>
+            <a:endParaRPr lang="en-US" dirty="0"/>
           </a:p>
           <a:p>
             <a:pPr marL="457200" indent="-457200">
               <a:buFont typeface="+mj-lt"/>
               <a:buAutoNum type="arabicPeriod" startAt="3"/>
             </a:pPr>
-            <a:endParaRPr lang="en-US" dirty="0" smtClean="0"/>
+            <a:endParaRPr lang="en-US" dirty="0"/>
           </a:p>
           <a:p>
             <a:pPr marL="457200" indent="-457200">
               <a:buFont typeface="+mj-lt"/>
               <a:buAutoNum type="arabicPeriod" startAt="3"/>
             </a:pPr>
-            <a:endParaRPr lang="en-US" dirty="0" smtClean="0"/>
+            <a:endParaRPr lang="en-US" dirty="0"/>
           </a:p>
           <a:p>
             <a:pPr marL="457200" indent="-457200">
               <a:buFont typeface="+mj-lt"/>
               <a:buAutoNum type="arabicPeriod" startAt="3"/>
             </a:pPr>
-            <a:endParaRPr lang="en-US" dirty="0" smtClean="0"/>
+            <a:endParaRPr lang="en-US" dirty="0"/>
           </a:p>
           <a:p>
             <a:pPr marL="457200" indent="-457200">
               <a:buFont typeface="+mj-lt"/>
               <a:buAutoNum type="arabicPeriod" startAt="3"/>
             </a:pPr>
-            <a:endParaRPr lang="en-US" dirty="0" smtClean="0"/>
+            <a:endParaRPr lang="en-US" dirty="0"/>
           </a:p>
           <a:p>
             <a:pPr marL="0" indent="0">
               <a:buFont typeface="Arial" panose="020B0604020202020204" pitchFamily="34" charset="0"/>
               <a:buNone/>
             </a:pPr>
-            <a:endParaRPr lang="en-US" dirty="0" smtClean="0"/>
+            <a:endParaRPr lang="en-US" dirty="0"/>
           </a:p>
           <a:p>
             <a:pPr marL="457200" indent="-457200">
               <a:buFont typeface="+mj-lt"/>
               <a:buAutoNum type="arabicPeriod"/>
             </a:pPr>
-            <a:endParaRPr lang="en-US" dirty="0" smtClean="0"/>
+            <a:endParaRPr lang="en-US" dirty="0"/>
           </a:p>
           <a:p>
             <a:pPr marL="457200" indent="-457200">
@@ -5692,31 +5393,15 @@
               </a:lnSpc>
             </a:pPr>
             <a:r>
-              <a:rPr lang="en-US" sz="1400" dirty="0" smtClean="0"/>
-              <a:t>The </a:t>
-            </a:r>
-            <a:r>
               <a:rPr lang="en-US" sz="1400" dirty="0"/>
-              <a:t>fastest way for contributors to get </a:t>
-            </a:r>
-            <a:r>
-              <a:rPr lang="en-US" sz="1400" dirty="0" smtClean="0"/>
-              <a:t>code </a:t>
-            </a:r>
+              <a:t>The fastest way for contributors to get code included in the package is to provide code that fully meets our package standards. These are: </a:t>
+            </a:r>
+          </a:p>
+          <a:p>
+            <a:pPr marL="600075" lvl="1" indent="-257175"/>
             <a:r>
               <a:rPr lang="en-US" sz="1400" dirty="0"/>
-              <a:t>included in the package is to provide code that fully meets our package standards. These are: </a:t>
-            </a:r>
-          </a:p>
-          <a:p>
-            <a:pPr marL="600075" lvl="1" indent="-257175"/>
-            <a:r>
-              <a:rPr lang="en-US" sz="1400" dirty="0" smtClean="0"/>
-              <a:t>The </a:t>
-            </a:r>
-            <a:r>
-              <a:rPr lang="en-US" sz="1400" dirty="0"/>
-              <a:t>contributor is using the latest version of R, </a:t>
+              <a:t>The contributor is using the latest version of R, </a:t>
             </a:r>
             <a:r>
               <a:rPr lang="en-US" sz="1400" dirty="0" err="1"/>
@@ -5730,15 +5415,15 @@
           <a:p>
             <a:pPr marL="600075" lvl="1" indent="-257175"/>
             <a:r>
-              <a:rPr lang="en-US" sz="1400" dirty="0" smtClean="0"/>
+              <a:rPr lang="en-US" sz="1400" dirty="0"/>
               <a:t>Work is done in the “dev” branch directly in the </a:t>
             </a:r>
             <a:r>
-              <a:rPr lang="en-US" sz="1400" dirty="0" err="1" smtClean="0"/>
+              <a:rPr lang="en-US" sz="1400" dirty="0" err="1"/>
               <a:t>icesRDBES</a:t>
             </a:r>
             <a:r>
-              <a:rPr lang="en-US" sz="1400" dirty="0" smtClean="0"/>
+              <a:rPr lang="en-US" sz="1400" dirty="0"/>
               <a:t> core directories after issue is open</a:t>
             </a:r>
           </a:p>
@@ -5746,75 +5431,32 @@
             <a:pPr marL="600075" lvl="1" indent="-257175"/>
             <a:r>
               <a:rPr lang="en-US" sz="1400" dirty="0"/>
-              <a:t>Contributors should pull the </a:t>
-            </a:r>
-            <a:r>
-              <a:rPr lang="en-US" sz="1400" dirty="0" smtClean="0"/>
-              <a:t>“dev” </a:t>
+              <a:t>Contributors should pull the “dev” branch, make and commit changes on their local machine, and only push changes back to GitHub once their work is consistent (e.g. a new function is created and documented). For each function an R file exists in the \R directory, example data exists in \data, and vignettes in .</a:t>
+            </a:r>
+            <a:r>
+              <a:rPr lang="en-US" sz="1400" dirty="0" err="1"/>
+              <a:t>Rmd</a:t>
             </a:r>
             <a:r>
               <a:rPr lang="en-US" sz="1400" dirty="0"/>
-              <a:t>branch, make and commit changes on their local machine, and only push changes back to GitHub once their work is consistent (e.g. a new function is created and documented</a:t>
-            </a:r>
-            <a:r>
-              <a:rPr lang="en-US" sz="1400" dirty="0" smtClean="0"/>
-              <a:t>). For </a:t>
-            </a:r>
+              <a:t> code exist in \vignettes. </a:t>
+            </a:r>
+          </a:p>
+          <a:p>
+            <a:pPr marL="600075" lvl="1" indent="-257175"/>
             <a:r>
               <a:rPr lang="en-US" sz="1400" dirty="0"/>
-              <a:t>each function an R file exists in the </a:t>
-            </a:r>
-            <a:r>
-              <a:rPr lang="en-US" sz="1400" dirty="0" smtClean="0"/>
-              <a:t>\R directory, example data exists in \data, and vignettes in .</a:t>
-            </a:r>
-            <a:r>
-              <a:rPr lang="en-US" sz="1400" dirty="0" err="1" smtClean="0"/>
-              <a:t>Rmd</a:t>
-            </a:r>
-            <a:r>
-              <a:rPr lang="en-US" sz="1400" dirty="0" smtClean="0"/>
-              <a:t> code exist in \vignettes. </a:t>
-            </a:r>
-            <a:endParaRPr lang="en-US" sz="1400" dirty="0"/>
-          </a:p>
-          <a:p>
-            <a:pPr marL="600075" lvl="1" indent="-257175"/>
-            <a:r>
-              <a:rPr lang="en-US" sz="1400" dirty="0" smtClean="0"/>
-              <a:t>Consider the style guide </a:t>
-            </a:r>
-            <a:r>
-              <a:rPr lang="en-US" sz="1400" dirty="0"/>
-              <a:t>developed </a:t>
-            </a:r>
-            <a:r>
-              <a:rPr lang="en-US" sz="1400" dirty="0" smtClean="0"/>
-              <a:t>during </a:t>
-            </a:r>
-            <a:r>
-              <a:rPr lang="en-US" sz="1400" dirty="0"/>
-              <a:t>WKRDB-EST 1-2 </a:t>
+              <a:t>Consider the style guide developed during WKRDB-EST 1-2 </a:t>
             </a:r>
             <a:r>
               <a:rPr lang="en-US" sz="1400" dirty="0">
                 <a:hlinkClick r:id="rId2"/>
               </a:rPr>
-              <a:t>https://</a:t>
-            </a:r>
-            <a:r>
-              <a:rPr lang="en-US" sz="1400" dirty="0" smtClean="0">
-                <a:hlinkClick r:id="rId2"/>
-              </a:rPr>
-              <a:t>github.com/ices-eg/WK_RDBES/blob/master/WKRDB-EST2/styleGuideCodeRDBES.pdf</a:t>
-            </a:r>
-            <a:r>
-              <a:rPr lang="en-US" sz="1400" dirty="0" smtClean="0"/>
-              <a:t>. It </a:t>
+              <a:t>https://github.com/ices-eg/WK_RDBES/blob/master/WKRDB-EST2/styleGuideCodeRDBES.pdf</a:t>
             </a:r>
             <a:r>
               <a:rPr lang="en-US" sz="1400" dirty="0"/>
-              <a:t>is preferable for contributors to only use base R but the following packages (and their dependencies) are also allowed: </a:t>
+              <a:t>. It is preferable for contributors to only use base R but the following packages (and their dependencies) are also allowed: </a:t>
             </a:r>
             <a:r>
               <a:rPr lang="en-US" sz="1400" b="1" dirty="0" err="1"/>
@@ -5844,12 +5486,8 @@
           <a:p>
             <a:pPr marL="600075" lvl="1" indent="-257175"/>
             <a:r>
-              <a:rPr lang="en-US" sz="1400" dirty="0" smtClean="0"/>
-              <a:t>Full </a:t>
-            </a:r>
-            <a:r>
               <a:rPr lang="en-US" sz="1400" dirty="0"/>
-              <a:t>roxygen2 documentation has been generated for that function and any data included. A good example of comprehensive documentation can be provided by the “gam” function (</a:t>
+              <a:t>Full roxygen2 documentation has been generated for that function and any data included. A good example of comprehensive documentation can be provided by the “gam” function (</a:t>
             </a:r>
             <a:r>
               <a:rPr lang="en-US" sz="1400" dirty="0">
@@ -5861,23 +5499,13 @@
               <a:rPr lang="en-US" sz="1400" dirty="0"/>
               <a:t> ). This level of documentation might not be appropriate or feasible in all cases but does show some important features to bear in mind. </a:t>
             </a:r>
-            <a:endParaRPr lang="en-US" sz="1400" dirty="0" smtClean="0"/>
           </a:p>
           <a:p>
             <a:pPr marL="600075" lvl="1" indent="-257175"/>
             <a:r>
-              <a:rPr lang="en-US" sz="1400" dirty="0" smtClean="0"/>
-              <a:t>The </a:t>
-            </a:r>
-            <a:r>
               <a:rPr lang="en-US" sz="1400" dirty="0"/>
-              <a:t>contributor has defined tests for all new functionality </a:t>
-            </a:r>
-            <a:r>
-              <a:rPr lang="en-US" sz="1400" dirty="0" smtClean="0"/>
-              <a:t>(committed to \tests)</a:t>
-            </a:r>
-            <a:endParaRPr lang="en-US" sz="1400" dirty="0"/>
+              <a:t>The contributor has defined tests for all new functionality (committed to \tests)</a:t>
+            </a:r>
           </a:p>
           <a:p>
             <a:pPr marL="600075" lvl="1" indent="-257175"/>
@@ -5894,22 +5522,14 @@
             <a:pPr marL="600075" lvl="1" indent="-257175"/>
             <a:r>
               <a:rPr lang="en-US" sz="1400" dirty="0"/>
-              <a:t>The code passes the automatic lint checks </a:t>
-            </a:r>
-            <a:r>
-              <a:rPr lang="en-US" sz="1400" dirty="0" smtClean="0"/>
-              <a:t>(when these are included in the package)</a:t>
+              <a:t>The code passes the automatic lint checks (when these are included in the package)</a:t>
             </a:r>
           </a:p>
           <a:p>
             <a:pPr marL="600075" lvl="1" indent="-257175"/>
             <a:r>
-              <a:rPr lang="en-US" sz="1400" dirty="0" smtClean="0"/>
-              <a:t>A </a:t>
-            </a:r>
-            <a:r>
               <a:rPr lang="en-US" sz="1400" dirty="0"/>
-              <a:t>pull request needs to be created when we want to merge the development branch into the master branch – the maintainers will need to approve the pull request </a:t>
+              <a:t>A pull request needs to be created when we want to merge the development branch into the master branch – the maintainers will need to approve the pull request </a:t>
             </a:r>
           </a:p>
           <a:p>
@@ -5943,13 +5563,6 @@
       </p:transition>
     </mc:Fallback>
   </mc:AlternateContent>
-  <p:timing>
-    <p:tnLst>
-      <p:par>
-        <p:cTn id="1" dur="indefinite" restart="never" nodeType="tmRoot"/>
-      </p:par>
-    </p:tnLst>
-  </p:timing>
 </p:sld>
 </file>
 
@@ -6029,15 +5642,7 @@
                   <a:schemeClr val="tx1"/>
                 </a:solidFill>
               </a:rPr>
-              <a:t>Contributing to already existing </a:t>
-            </a:r>
-            <a:r>
-              <a:rPr lang="en-US" sz="4000" dirty="0" smtClean="0">
-                <a:solidFill>
-                  <a:schemeClr val="tx1"/>
-                </a:solidFill>
-              </a:rPr>
-              <a:t>functions</a:t>
+              <a:t>Contributing to already existing functions</a:t>
             </a:r>
             <a:endParaRPr lang="sv-SE" sz="4000" dirty="0">
               <a:solidFill>
@@ -6075,7 +5680,7 @@
               </a:lnSpc>
             </a:pPr>
             <a:r>
-              <a:rPr lang="en-US" dirty="0" smtClean="0"/>
+              <a:rPr lang="en-US" dirty="0"/>
               <a:t>Are you contributing to a function you are the main contributor of?</a:t>
             </a:r>
           </a:p>
@@ -6086,7 +5691,7 @@
               </a:lnSpc>
             </a:pPr>
             <a:r>
-              <a:rPr lang="en-US" b="1" dirty="0" smtClean="0"/>
+              <a:rPr lang="en-US" b="1" dirty="0"/>
               <a:t>Yes</a:t>
             </a:r>
           </a:p>
@@ -6097,7 +5702,7 @@
               </a:lnSpc>
             </a:pPr>
             <a:r>
-              <a:rPr lang="en-US" dirty="0" smtClean="0"/>
+              <a:rPr lang="en-US" dirty="0"/>
               <a:t>Open an issue, label it and assign it to yourself [so others know you are working on it]</a:t>
             </a:r>
           </a:p>
@@ -6108,16 +5713,8 @@
               </a:lnSpc>
             </a:pPr>
             <a:r>
-              <a:rPr lang="en-US" dirty="0" smtClean="0"/>
-              <a:t>Code your changes, test them, </a:t>
-            </a:r>
-            <a:r>
-              <a:rPr lang="en-US" dirty="0"/>
-              <a:t>and commit your changes including the text “Closes #n” (where n is the issue number) in the commit </a:t>
-            </a:r>
-            <a:r>
-              <a:rPr lang="en-US" dirty="0" smtClean="0"/>
-              <a:t>message</a:t>
+              <a:rPr lang="en-US" dirty="0"/>
+              <a:t>Code your changes, test them, and commit your changes including the text “Closes #n” (where n is the issue number) in the commit message</a:t>
             </a:r>
           </a:p>
           <a:p>
@@ -6127,7 +5724,7 @@
               </a:lnSpc>
             </a:pPr>
             <a:r>
-              <a:rPr lang="en-US" b="1" dirty="0" smtClean="0"/>
+              <a:rPr lang="en-US" b="1" dirty="0"/>
               <a:t>No</a:t>
             </a:r>
           </a:p>
@@ -6138,16 +5735,8 @@
               </a:lnSpc>
             </a:pPr>
             <a:r>
-              <a:rPr lang="en-US" dirty="0" smtClean="0"/>
-              <a:t>Open </a:t>
-            </a:r>
-            <a:r>
-              <a:rPr lang="en-US" dirty="0"/>
-              <a:t>an </a:t>
-            </a:r>
-            <a:r>
-              <a:rPr lang="en-US" dirty="0" smtClean="0"/>
-              <a:t>issue, label it and assign it to the main contributor </a:t>
+              <a:rPr lang="en-US" dirty="0"/>
+              <a:t>Open an issue, label it and assign it to the main contributor </a:t>
             </a:r>
           </a:p>
           <a:p>
@@ -6157,16 +5746,8 @@
               </a:lnSpc>
             </a:pPr>
             <a:r>
-              <a:rPr lang="en-US" dirty="0" smtClean="0"/>
-              <a:t>Check with him/her if it is needed to address it [he/she might already be working on it] </a:t>
-            </a:r>
-            <a:r>
-              <a:rPr lang="en-US" dirty="0"/>
-              <a:t>and get ideas on </a:t>
-            </a:r>
-            <a:r>
-              <a:rPr lang="en-US" dirty="0" smtClean="0"/>
-              <a:t>solutions [there may be solutions already thought of]</a:t>
+              <a:rPr lang="en-US" dirty="0"/>
+              <a:t>Check with him/her if it is needed to address it [he/she might already be working on it] and get ideas on solutions [there may be solutions already thought of]</a:t>
             </a:r>
           </a:p>
           <a:p>
@@ -6177,13 +5758,9 @@
             </a:pPr>
             <a:r>
               <a:rPr lang="en-US"/>
-              <a:t>Code your changes, test them, and commit your changes including the text “Closes #n” (where n is the issue number) in the commit </a:t>
-            </a:r>
-            <a:r>
-              <a:rPr lang="en-US" smtClean="0"/>
-              <a:t>message</a:t>
-            </a:r>
-            <a:endParaRPr lang="en-US" dirty="0" smtClean="0"/>
+              <a:t>Code your changes, test them, and commit your changes including the text “Closes #n” (where n is the issue number) in the commit message</a:t>
+            </a:r>
+            <a:endParaRPr lang="en-US" dirty="0"/>
           </a:p>
           <a:p>
             <a:pPr lvl="1">
@@ -6217,13 +5794,6 @@
       </p:transition>
     </mc:Fallback>
   </mc:AlternateContent>
-  <p:timing>
-    <p:tnLst>
-      <p:par>
-        <p:cTn id="1" dur="indefinite" restart="never" nodeType="tmRoot"/>
-      </p:par>
-    </p:tnLst>
-  </p:timing>
 </p:sld>
 </file>
 
@@ -6260,7 +5830,7 @@
           <a:lstStyle/>
           <a:p>
             <a:r>
-              <a:rPr lang="en-US" dirty="0" smtClean="0"/>
+              <a:rPr lang="en-US" dirty="0"/>
               <a:t>Contents</a:t>
             </a:r>
             <a:endParaRPr lang="sv-SE" dirty="0"/>
@@ -6288,20 +5858,12 @@
               </a:lnSpc>
             </a:pPr>
             <a:r>
-              <a:rPr lang="en-US" b="1" dirty="0" smtClean="0"/>
+              <a:rPr lang="en-US" b="1" dirty="0"/>
               <a:t>Slide 3:</a:t>
             </a:r>
             <a:r>
-              <a:rPr lang="en-US" dirty="0" smtClean="0"/>
-              <a:t> Time </a:t>
-            </a:r>
-            <a:r>
-              <a:rPr lang="en-US" dirty="0"/>
-              <a:t>table </a:t>
-            </a:r>
-            <a:r>
-              <a:rPr lang="en-US" dirty="0" smtClean="0"/>
-              <a:t>of development</a:t>
+              <a:rPr lang="en-US" dirty="0"/>
+              <a:t> Time table of development</a:t>
             </a:r>
           </a:p>
           <a:p>
@@ -6312,23 +5874,11 @@
             </a:pPr>
             <a:r>
               <a:rPr lang="en-US" b="1" dirty="0"/>
-              <a:t>Slide </a:t>
-            </a:r>
-            <a:r>
-              <a:rPr lang="en-US" b="1" dirty="0" smtClean="0"/>
-              <a:t>4: </a:t>
-            </a:r>
-            <a:r>
-              <a:rPr lang="en-US" dirty="0" smtClean="0"/>
-              <a:t>Overview </a:t>
-            </a:r>
-            <a:r>
-              <a:rPr lang="en-US" dirty="0"/>
-              <a:t>of routine </a:t>
-            </a:r>
-            <a:r>
-              <a:rPr lang="en-US" dirty="0" smtClean="0"/>
-              <a:t>work-flow</a:t>
+              <a:t>Slide 4: </a:t>
+            </a:r>
+            <a:r>
+              <a:rPr lang="en-US" dirty="0"/>
+              <a:t>Overview of routine work-flow</a:t>
             </a:r>
           </a:p>
           <a:p>
@@ -6338,11 +5888,11 @@
               </a:lnSpc>
             </a:pPr>
             <a:r>
-              <a:rPr lang="en-US" b="1" dirty="0" smtClean="0"/>
+              <a:rPr lang="en-US" b="1" dirty="0"/>
               <a:t>Slide 5-14: </a:t>
             </a:r>
             <a:r>
-              <a:rPr lang="en-US" dirty="0" smtClean="0"/>
+              <a:rPr lang="en-US" dirty="0"/>
               <a:t>Building of new functions</a:t>
             </a:r>
           </a:p>
@@ -6353,28 +5903,12 @@
               </a:lnSpc>
             </a:pPr>
             <a:r>
-              <a:rPr lang="en-US" sz="1600" b="1" dirty="0" smtClean="0"/>
+              <a:rPr lang="en-US" sz="1600" b="1" dirty="0"/>
               <a:t>[slide 5-12]: </a:t>
             </a:r>
             <a:r>
-              <a:rPr lang="en-US" sz="1600" dirty="0" smtClean="0"/>
-              <a:t>If you have little </a:t>
-            </a:r>
-            <a:r>
               <a:rPr lang="en-US" sz="1600" dirty="0"/>
-              <a:t>experience </a:t>
-            </a:r>
-            <a:r>
-              <a:rPr lang="en-US" sz="1600" dirty="0" smtClean="0"/>
-              <a:t>in contributing functions to </a:t>
-            </a:r>
-            <a:r>
-              <a:rPr lang="en-US" sz="1600" dirty="0"/>
-              <a:t>R </a:t>
-            </a:r>
-            <a:r>
-              <a:rPr lang="en-US" sz="1600" dirty="0" smtClean="0"/>
-              <a:t>packages </a:t>
+              <a:t>If you have little experience in contributing functions to R packages </a:t>
             </a:r>
           </a:p>
           <a:p>
@@ -6385,31 +5919,11 @@
             </a:pPr>
             <a:r>
               <a:rPr lang="en-US" sz="1600" b="1" dirty="0"/>
-              <a:t>[slide </a:t>
-            </a:r>
-            <a:r>
-              <a:rPr lang="en-US" sz="1600" b="1" dirty="0" smtClean="0"/>
-              <a:t>13-14]</a:t>
-            </a:r>
-            <a:r>
-              <a:rPr lang="en-US" sz="1600" dirty="0" smtClean="0"/>
-              <a:t>: If you have some previous experience in </a:t>
+              <a:t>[slide 13-14]</a:t>
             </a:r>
             <a:r>
               <a:rPr lang="en-US" sz="1600" dirty="0"/>
-              <a:t>contributing </a:t>
-            </a:r>
-            <a:r>
-              <a:rPr lang="en-US" sz="1600" dirty="0" smtClean="0"/>
-              <a:t>functions to </a:t>
-            </a:r>
-            <a:r>
-              <a:rPr lang="en-US" sz="1600" dirty="0"/>
-              <a:t>R </a:t>
-            </a:r>
-            <a:r>
-              <a:rPr lang="en-US" sz="1600" dirty="0" smtClean="0"/>
-              <a:t>packages</a:t>
+              <a:t>: If you have some previous experience in contributing functions to R packages</a:t>
             </a:r>
           </a:p>
           <a:p>
@@ -6419,11 +5933,11 @@
               </a:lnSpc>
             </a:pPr>
             <a:r>
-              <a:rPr lang="en-US" b="1" dirty="0" smtClean="0"/>
+              <a:rPr lang="en-US" b="1" dirty="0"/>
               <a:t>Slide 15</a:t>
             </a:r>
             <a:r>
-              <a:rPr lang="en-US" b="1" dirty="0" smtClean="0">
+              <a:rPr lang="en-US" b="1" dirty="0">
                 <a:solidFill>
                   <a:schemeClr val="tx1"/>
                 </a:solidFill>
@@ -6431,7 +5945,7 @@
               <a:t>: </a:t>
             </a:r>
             <a:r>
-              <a:rPr lang="en-US" dirty="0" smtClean="0">
+              <a:rPr lang="en-US" dirty="0">
                 <a:solidFill>
                   <a:schemeClr val="tx1"/>
                 </a:solidFill>
@@ -6456,13 +5970,6 @@
   <p:clrMapOvr>
     <a:masterClrMapping/>
   </p:clrMapOvr>
-  <p:timing>
-    <p:tnLst>
-      <p:par>
-        <p:cTn id="1" dur="indefinite" restart="never" nodeType="tmRoot"/>
-      </p:par>
-    </p:tnLst>
-  </p:timing>
 </p:sld>
 </file>
 
@@ -6506,11 +6013,11 @@
           <a:lstStyle/>
           <a:p>
             <a:r>
-              <a:rPr lang="en-US" dirty="0" smtClean="0"/>
+              <a:rPr lang="en-US" dirty="0"/>
               <a:t>Time table of development </a:t>
             </a:r>
             <a:r>
-              <a:rPr lang="en-US" sz="2000" dirty="0" smtClean="0"/>
+              <a:rPr lang="en-US" sz="2000" dirty="0"/>
               <a:t>(as of 25/11/2021)</a:t>
             </a:r>
             <a:endParaRPr lang="sv-SE" sz="2000" dirty="0"/>
@@ -6565,13 +6072,6 @@
       </p:transition>
     </mc:Fallback>
   </mc:AlternateContent>
-  <p:timing>
-    <p:tnLst>
-      <p:par>
-        <p:cTn id="1" dur="indefinite" restart="never" nodeType="tmRoot"/>
-      </p:par>
-    </p:tnLst>
-  </p:timing>
 </p:sld>
 </file>
 
@@ -6615,7 +6115,7 @@
           <a:p>
             <a:pPr algn="l"/>
             <a:r>
-              <a:rPr lang="en-US" sz="1400" b="1" dirty="0" smtClean="0">
+              <a:rPr lang="en-US" sz="1400" b="1" dirty="0">
                 <a:solidFill>
                   <a:schemeClr val="accent1"/>
                 </a:solidFill>
@@ -6624,7 +6124,7 @@
               <a:t>Bold: </a:t>
             </a:r>
             <a:r>
-              <a:rPr lang="en-US" sz="1400" dirty="0" smtClean="0">
+              <a:rPr lang="en-US" sz="1400" dirty="0">
                 <a:solidFill>
                   <a:schemeClr val="accent1"/>
                 </a:solidFill>
@@ -6632,7 +6132,7 @@
               </a:rPr>
               <a:t>Main decision points; MC = Main Contributor; TG = test group; PG = supporting package group</a:t>
             </a:r>
-            <a:endParaRPr lang="sv-SE" sz="1400" dirty="0" err="1" smtClean="0">
+            <a:endParaRPr lang="sv-SE" sz="1400" dirty="0" err="1">
               <a:solidFill>
                 <a:schemeClr val="accent1"/>
               </a:solidFill>
@@ -6664,7 +6164,7 @@
           <a:lstStyle/>
           <a:p>
             <a:r>
-              <a:rPr lang="en-US" dirty="0" smtClean="0"/>
+              <a:rPr lang="en-US" dirty="0"/>
               <a:t>Overview of routine work-flow</a:t>
             </a:r>
             <a:endParaRPr lang="sv-SE" dirty="0"/>
@@ -6716,10 +6216,10 @@
           <a:p>
             <a:pPr algn="ctr"/>
             <a:r>
-              <a:rPr lang="en-US" sz="1400" dirty="0" smtClean="0"/>
+              <a:rPr lang="en-US" sz="1400" dirty="0"/>
               <a:t>Meeting</a:t>
             </a:r>
-            <a:endParaRPr lang="sv-SE" sz="1400" dirty="0" err="1" smtClean="0"/>
+            <a:endParaRPr lang="sv-SE" sz="1400" dirty="0" err="1"/>
           </a:p>
         </p:txBody>
       </p:sp>
@@ -6770,14 +6270,14 @@
           <a:p>
             <a:pPr algn="ctr"/>
             <a:r>
-              <a:rPr lang="en-US" sz="1400" dirty="0" smtClean="0">
+              <a:rPr lang="en-US" sz="1400" dirty="0">
                 <a:solidFill>
                   <a:schemeClr val="tx1"/>
                 </a:solidFill>
               </a:rPr>
               <a:t>Development</a:t>
             </a:r>
-            <a:endParaRPr lang="sv-SE" sz="1400" dirty="0" err="1" smtClean="0">
+            <a:endParaRPr lang="sv-SE" sz="1400" dirty="0" err="1">
               <a:solidFill>
                 <a:schemeClr val="tx1"/>
               </a:solidFill>
@@ -6832,14 +6332,14 @@
           <a:p>
             <a:pPr algn="ctr"/>
             <a:r>
-              <a:rPr lang="en-US" sz="1400" dirty="0" smtClean="0">
+              <a:rPr lang="en-US" sz="1400" dirty="0">
                 <a:solidFill>
                   <a:schemeClr val="tx1"/>
                 </a:solidFill>
               </a:rPr>
               <a:t>Testing</a:t>
             </a:r>
-            <a:endParaRPr lang="sv-SE" sz="1400" dirty="0" err="1" smtClean="0">
+            <a:endParaRPr lang="sv-SE" sz="1400" dirty="0" err="1">
               <a:solidFill>
                 <a:schemeClr val="tx1"/>
               </a:solidFill>
@@ -6892,10 +6392,10 @@
           <a:p>
             <a:pPr algn="ctr"/>
             <a:r>
-              <a:rPr lang="en-US" sz="1400" dirty="0" smtClean="0"/>
+              <a:rPr lang="en-US" sz="1400" dirty="0"/>
               <a:t>Meeting</a:t>
             </a:r>
-            <a:endParaRPr lang="sv-SE" sz="1400" dirty="0" err="1" smtClean="0"/>
+            <a:endParaRPr lang="sv-SE" sz="1400" dirty="0" err="1"/>
           </a:p>
         </p:txBody>
       </p:sp>
@@ -6944,10 +6444,10 @@
           <a:p>
             <a:pPr algn="ctr"/>
             <a:r>
-              <a:rPr lang="en-US" sz="1400" dirty="0" smtClean="0"/>
+              <a:rPr lang="en-US" sz="1400" dirty="0"/>
               <a:t>Meeting</a:t>
             </a:r>
-            <a:endParaRPr lang="sv-SE" sz="1400" dirty="0" err="1" smtClean="0"/>
+            <a:endParaRPr lang="sv-SE" sz="1400" dirty="0" err="1"/>
           </a:p>
         </p:txBody>
       </p:sp>
@@ -6996,10 +6496,10 @@
           <a:p>
             <a:pPr algn="ctr"/>
             <a:r>
-              <a:rPr lang="en-US" sz="1400" dirty="0" smtClean="0"/>
+              <a:rPr lang="en-US" sz="1400" dirty="0"/>
               <a:t>Packaging</a:t>
             </a:r>
-            <a:endParaRPr lang="sv-SE" sz="1400" dirty="0" err="1" smtClean="0"/>
+            <a:endParaRPr lang="sv-SE" sz="1400" dirty="0" err="1"/>
           </a:p>
         </p:txBody>
       </p:sp>
@@ -7030,12 +6530,8 @@
               </a:lnSpc>
             </a:pPr>
             <a:r>
-              <a:rPr lang="en-GB" b="1" dirty="0" smtClean="0"/>
-              <a:t>Meet: identify </a:t>
-            </a:r>
-            <a:r>
               <a:rPr lang="en-GB" b="1" dirty="0"/>
-              <a:t>what functions needs produced [issues are open in GitHub and main contributor MC identified]</a:t>
+              <a:t>Meet: identify what functions needs produced [issues are open in GitHub and main contributor MC identified]</a:t>
             </a:r>
             <a:endParaRPr lang="en-GB" dirty="0"/>
           </a:p>
@@ -7420,13 +6916,6 @@
       </p:transition>
     </mc:Fallback>
   </mc:AlternateContent>
-  <p:timing>
-    <p:tnLst>
-      <p:par>
-        <p:cTn id="1" dur="indefinite" restart="never" nodeType="tmRoot"/>
-      </p:par>
-    </p:tnLst>
-  </p:timing>
 </p:sld>
 </file>
 
@@ -7472,20 +6961,8 @@
               <a:buAutoNum type="arabicPeriod"/>
             </a:pPr>
             <a:r>
-              <a:rPr lang="en-US" dirty="0" smtClean="0"/>
-              <a:t>Install latest </a:t>
-            </a:r>
-            <a:r>
-              <a:rPr lang="en-US" dirty="0"/>
-              <a:t>version of </a:t>
-            </a:r>
-            <a:r>
-              <a:rPr lang="en-US" dirty="0" smtClean="0"/>
-              <a:t>R</a:t>
-            </a:r>
-            <a:r>
-              <a:rPr lang="en-US" dirty="0"/>
-              <a:t>, </a:t>
+              <a:rPr lang="en-US" dirty="0"/>
+              <a:t>Install latest version of R, </a:t>
             </a:r>
             <a:r>
               <a:rPr lang="en-US" dirty="0" err="1"/>
@@ -7493,11 +6970,7 @@
             </a:r>
             <a:r>
               <a:rPr lang="en-US" dirty="0"/>
-              <a:t> and any </a:t>
-            </a:r>
-            <a:r>
-              <a:rPr lang="en-US" dirty="0" smtClean="0"/>
-              <a:t>dependencies; R-studio also comes handy</a:t>
+              <a:t> and any dependencies; R-studio also comes handy</a:t>
             </a:r>
           </a:p>
           <a:p>
@@ -7588,7 +7061,7 @@
               <a:buAutoNum type="arabicPeriod"/>
             </a:pPr>
             <a:r>
-              <a:rPr lang="en-US" dirty="0" smtClean="0"/>
+              <a:rPr lang="en-US" dirty="0"/>
               <a:t>Install “remotes”</a:t>
             </a:r>
           </a:p>
@@ -7598,11 +7071,11 @@
               <a:buAutoNum type="arabicPeriod"/>
             </a:pPr>
             <a:r>
-              <a:rPr lang="en-US" dirty="0" smtClean="0"/>
+              <a:rPr lang="en-US" dirty="0"/>
               <a:t>Install latest version of </a:t>
             </a:r>
             <a:r>
-              <a:rPr lang="en-US" dirty="0" err="1" smtClean="0"/>
+              <a:rPr lang="en-US" dirty="0" err="1"/>
               <a:t>icesRDBES</a:t>
             </a:r>
             <a:endParaRPr lang="sv-SE" dirty="0"/>
@@ -7659,7 +7132,7 @@
           <a:lstStyle/>
           <a:p>
             <a:r>
-              <a:rPr lang="en-US" dirty="0" smtClean="0"/>
+              <a:rPr lang="en-US" dirty="0"/>
               <a:t>First steps: set-up your workspace</a:t>
             </a:r>
             <a:endParaRPr lang="sv-SE" dirty="0"/>
@@ -7688,13 +7161,6 @@
       </p:transition>
     </mc:Fallback>
   </mc:AlternateContent>
-  <p:timing>
-    <p:tnLst>
-      <p:par>
-        <p:cTn id="1" dur="indefinite" restart="never" nodeType="tmRoot"/>
-      </p:par>
-    </p:tnLst>
-  </p:timing>
 </p:sld>
 </file>
 
@@ -7745,7 +7211,7 @@
               <a:buAutoNum type="arabicPeriod" startAt="4"/>
             </a:pPr>
             <a:r>
-              <a:rPr lang="en-US" dirty="0" smtClean="0">
+              <a:rPr lang="en-US" dirty="0">
                 <a:solidFill>
                   <a:schemeClr val="tx1"/>
                 </a:solidFill>
@@ -7753,7 +7219,7 @@
               <a:t>If not already done: Request writing access to </a:t>
             </a:r>
             <a:r>
-              <a:rPr lang="en-US" dirty="0" err="1" smtClean="0">
+              <a:rPr lang="en-US" dirty="0" err="1">
                 <a:solidFill>
                   <a:schemeClr val="tx1"/>
                 </a:solidFill>
@@ -7761,7 +7227,7 @@
               <a:t>icesRDBES</a:t>
             </a:r>
             <a:r>
-              <a:rPr lang="en-US" dirty="0" smtClean="0">
+              <a:rPr lang="en-US" dirty="0">
                 <a:solidFill>
                   <a:schemeClr val="tx1"/>
                 </a:solidFill>
@@ -7778,57 +7244,25 @@
               <a:buAutoNum type="arabicPeriod" startAt="4"/>
             </a:pPr>
             <a:r>
-              <a:rPr lang="en-GB" dirty="0" smtClean="0">
-                <a:solidFill>
-                  <a:schemeClr val="tx1"/>
-                </a:solidFill>
-              </a:rPr>
-              <a:t>Open </a:t>
-            </a:r>
-            <a:r>
               <a:rPr lang="en-GB" dirty="0">
                 <a:solidFill>
                   <a:schemeClr val="tx1"/>
                 </a:solidFill>
               </a:rPr>
-              <a:t>an issue </a:t>
-            </a:r>
-            <a:r>
-              <a:rPr lang="en-GB" dirty="0" smtClean="0">
-                <a:solidFill>
-                  <a:schemeClr val="tx1"/>
-                </a:solidFill>
-              </a:rPr>
-              <a:t>that details on what </a:t>
-            </a:r>
+              <a:t>Open an issue that details on what you will be working on. </a:t>
+            </a:r>
+          </a:p>
+          <a:p>
+            <a:pPr marL="900113" lvl="1" indent="-450850"/>
             <a:r>
               <a:rPr lang="en-GB" dirty="0">
                 <a:solidFill>
                   <a:schemeClr val="tx1"/>
                 </a:solidFill>
               </a:rPr>
-              <a:t>you will be working </a:t>
-            </a:r>
-            <a:r>
-              <a:rPr lang="en-GB" dirty="0" smtClean="0">
-                <a:solidFill>
-                  <a:schemeClr val="tx1"/>
-                </a:solidFill>
-              </a:rPr>
-              <a:t>on. </a:t>
-            </a:r>
-          </a:p>
-          <a:p>
-            <a:pPr marL="900113" lvl="1" indent="-450850"/>
-            <a:r>
-              <a:rPr lang="en-GB" dirty="0" smtClean="0">
-                <a:solidFill>
-                  <a:schemeClr val="tx1"/>
-                </a:solidFill>
-              </a:rPr>
               <a:t>This will signal to others what you are doing and avoid duplication; also allow you to make your contributions more visible.</a:t>
             </a:r>
-            <a:endParaRPr lang="en-US" dirty="0" smtClean="0">
+            <a:endParaRPr lang="en-US" dirty="0">
               <a:solidFill>
                 <a:schemeClr val="tx1"/>
               </a:solidFill>
@@ -7843,7 +7277,7 @@
               <a:buAutoNum type="arabicPeriod" startAt="4"/>
             </a:pPr>
             <a:r>
-              <a:rPr lang="en-GB" dirty="0" smtClean="0">
+              <a:rPr lang="en-GB" dirty="0">
                 <a:solidFill>
                   <a:schemeClr val="tx1"/>
                 </a:solidFill>
@@ -7873,7 +7307,7 @@
               <a:buAutoNum type="arabicPeriod" startAt="4"/>
             </a:pPr>
             <a:r>
-              <a:rPr lang="en-GB" dirty="0" smtClean="0">
+              <a:rPr lang="en-GB" dirty="0">
                 <a:solidFill>
                   <a:schemeClr val="tx1"/>
                 </a:solidFill>
@@ -7887,7 +7321,7 @@
               <a:buAutoNum type="alphaUcPeriod"/>
             </a:pPr>
             <a:r>
-              <a:rPr lang="en-GB" dirty="0" smtClean="0">
+              <a:rPr lang="en-GB" dirty="0">
                 <a:solidFill>
                   <a:schemeClr val="tx1"/>
                 </a:solidFill>
@@ -7898,101 +7332,12 @@
           <a:p>
             <a:pPr marL="892788" lvl="2" indent="-439738"/>
             <a:r>
-              <a:rPr lang="en-GB" dirty="0" smtClean="0">
+              <a:rPr lang="en-GB" dirty="0">
                 <a:solidFill>
                   <a:schemeClr val="tx1"/>
                 </a:solidFill>
               </a:rPr>
               <a:t>This means your functions and changes will be readily available to those (including you) interested in building a local “dev version” of the </a:t>
-            </a:r>
-            <a:r>
-              <a:rPr lang="en-GB" dirty="0" err="1" smtClean="0">
-                <a:solidFill>
-                  <a:schemeClr val="tx1"/>
-                </a:solidFill>
-              </a:rPr>
-              <a:t>icesRDBES</a:t>
-            </a:r>
-            <a:r>
-              <a:rPr lang="en-GB" dirty="0" smtClean="0">
-                <a:solidFill>
-                  <a:schemeClr val="tx1"/>
-                </a:solidFill>
-              </a:rPr>
-              <a:t> package.</a:t>
-            </a:r>
-          </a:p>
-          <a:p>
-            <a:pPr marL="892788" lvl="2" indent="-439738"/>
-            <a:r>
-              <a:rPr lang="en-GB" dirty="0" smtClean="0">
-                <a:solidFill>
-                  <a:schemeClr val="tx1"/>
-                </a:solidFill>
-              </a:rPr>
-              <a:t>If you are not experienced with building packages and the checks and procedures involved, some changes you make may lead code to break</a:t>
-            </a:r>
-          </a:p>
-          <a:p>
-            <a:pPr marL="712788" lvl="1" indent="-439738">
-              <a:buFont typeface="+mj-lt"/>
-              <a:buAutoNum type="alphaUcPeriod"/>
-            </a:pPr>
-            <a:r>
-              <a:rPr lang="en-GB" dirty="0" smtClean="0">
-                <a:solidFill>
-                  <a:schemeClr val="tx1"/>
-                </a:solidFill>
-              </a:rPr>
-              <a:t>Work on folder WGRDBES\personal </a:t>
-            </a:r>
-            <a:r>
-              <a:rPr lang="en-GB" dirty="0" smtClean="0">
-                <a:solidFill>
-                  <a:schemeClr val="tx1"/>
-                </a:solidFill>
-              </a:rPr>
-              <a:t>[less advised]</a:t>
-            </a:r>
-            <a:endParaRPr lang="en-GB" dirty="0" smtClean="0">
-              <a:solidFill>
-                <a:schemeClr val="tx1"/>
-              </a:solidFill>
-            </a:endParaRPr>
-          </a:p>
-          <a:p>
-            <a:pPr marL="892788" lvl="2" indent="-439738"/>
-            <a:r>
-              <a:rPr lang="en-GB" dirty="0" smtClean="0">
-                <a:solidFill>
-                  <a:schemeClr val="tx1"/>
-                </a:solidFill>
-              </a:rPr>
-              <a:t>This means your functions will not be </a:t>
-            </a:r>
-            <a:r>
-              <a:rPr lang="en-GB" dirty="0">
-                <a:solidFill>
-                  <a:schemeClr val="tx1"/>
-                </a:solidFill>
-              </a:rPr>
-              <a:t>readily </a:t>
-            </a:r>
-            <a:r>
-              <a:rPr lang="en-GB" dirty="0" smtClean="0">
-                <a:solidFill>
-                  <a:schemeClr val="tx1"/>
-                </a:solidFill>
-              </a:rPr>
-              <a:t>available local </a:t>
-            </a:r>
-            <a:r>
-              <a:rPr lang="en-GB" dirty="0">
-                <a:solidFill>
-                  <a:schemeClr val="tx1"/>
-                </a:solidFill>
-              </a:rPr>
-              <a:t>“dev version” of the </a:t>
             </a:r>
             <a:r>
               <a:rPr lang="en-GB" dirty="0" err="1">
@@ -8008,18 +7353,62 @@
                   <a:schemeClr val="tx1"/>
                 </a:solidFill>
               </a:rPr>
-              <a:t> </a:t>
-            </a:r>
-            <a:r>
-              <a:rPr lang="en-GB" dirty="0" smtClean="0">
+              <a:t> package.</a:t>
+            </a:r>
+          </a:p>
+          <a:p>
+            <a:pPr marL="892788" lvl="2" indent="-439738"/>
+            <a:r>
+              <a:rPr lang="en-GB" dirty="0">
                 <a:solidFill>
                   <a:schemeClr val="tx1"/>
                 </a:solidFill>
               </a:rPr>
-              <a:t>package [because WGRDBES directory is in </a:t>
-            </a:r>
-            <a:r>
-              <a:rPr lang="en-GB" dirty="0" err="1" smtClean="0">
+              <a:t>If you are not experienced with building packages and the checks and procedures involved, some changes you make may lead code to break</a:t>
+            </a:r>
+          </a:p>
+          <a:p>
+            <a:pPr marL="712788" lvl="1" indent="-439738">
+              <a:buFont typeface="+mj-lt"/>
+              <a:buAutoNum type="alphaUcPeriod"/>
+            </a:pPr>
+            <a:r>
+              <a:rPr lang="en-GB" dirty="0">
+                <a:solidFill>
+                  <a:schemeClr val="tx1"/>
+                </a:solidFill>
+              </a:rPr>
+              <a:t>Work on folder WGRDBES\personal [less advised]</a:t>
+            </a:r>
+          </a:p>
+          <a:p>
+            <a:pPr marL="892788" lvl="2" indent="-439738"/>
+            <a:r>
+              <a:rPr lang="en-GB" dirty="0">
+                <a:solidFill>
+                  <a:schemeClr val="tx1"/>
+                </a:solidFill>
+              </a:rPr>
+              <a:t>This means your functions will not be readily available local “dev version” of the </a:t>
+            </a:r>
+            <a:r>
+              <a:rPr lang="en-GB" dirty="0" err="1">
+                <a:solidFill>
+                  <a:schemeClr val="tx1"/>
+                </a:solidFill>
+              </a:rPr>
+              <a:t>icesRDBES</a:t>
+            </a:r>
+            <a:r>
+              <a:rPr lang="en-GB" dirty="0">
+                <a:solidFill>
+                  <a:schemeClr val="tx1"/>
+                </a:solidFill>
+              </a:rPr>
+              <a:t> package [because WGRDBES directory is in </a:t>
+            </a:r>
+            <a:r>
+              <a:rPr lang="en-GB" dirty="0" err="1">
                 <a:solidFill>
                   <a:schemeClr val="tx1"/>
                 </a:solidFill>
@@ -8027,7 +7416,7 @@
               <a:t>buildignore</a:t>
             </a:r>
             <a:r>
-              <a:rPr lang="en-GB" dirty="0" smtClean="0">
+              <a:rPr lang="en-GB" dirty="0">
                 <a:solidFill>
                   <a:schemeClr val="tx1"/>
                 </a:solidFill>
@@ -8038,7 +7427,7 @@
           <a:p>
             <a:pPr marL="892788" lvl="2" indent="-439738"/>
             <a:r>
-              <a:rPr lang="en-GB" dirty="0" smtClean="0">
+              <a:rPr lang="en-GB" dirty="0">
                 <a:solidFill>
                   <a:schemeClr val="tx1"/>
                 </a:solidFill>
@@ -8046,10 +7435,9 @@
               <a:t>Since its personal there are less risks of breaking others cod</a:t>
             </a:r>
             <a:r>
-              <a:rPr lang="en-GB" dirty="0" smtClean="0"/>
+              <a:rPr lang="en-GB" dirty="0"/>
               <a:t>e; But also less interaction with other contributors; and it will take more time for your functions to integrate the package</a:t>
             </a:r>
-            <a:endParaRPr lang="en-GB" dirty="0"/>
           </a:p>
           <a:p>
             <a:pPr marL="892788" lvl="2" indent="-439738"/>
@@ -8063,7 +7451,7 @@
               <a:buFont typeface="+mj-lt"/>
               <a:buAutoNum type="arabicPeriod" startAt="4"/>
             </a:pPr>
-            <a:endParaRPr lang="en-GB" dirty="0" smtClean="0"/>
+            <a:endParaRPr lang="en-GB" dirty="0"/>
           </a:p>
           <a:p>
             <a:pPr marL="457200" indent="-457200">
@@ -8073,7 +7461,7 @@
               <a:buFont typeface="+mj-lt"/>
               <a:buAutoNum type="arabicPeriod" startAt="4"/>
             </a:pPr>
-            <a:endParaRPr lang="en-US" dirty="0" smtClean="0"/>
+            <a:endParaRPr lang="en-US" dirty="0"/>
           </a:p>
           <a:p>
             <a:pPr marL="457200" indent="-457200">
@@ -8083,7 +7471,7 @@
               <a:buFont typeface="+mj-lt"/>
               <a:buAutoNum type="arabicPeriod" startAt="4"/>
             </a:pPr>
-            <a:endParaRPr lang="en-US" dirty="0" smtClean="0"/>
+            <a:endParaRPr lang="en-US" dirty="0"/>
           </a:p>
           <a:p>
             <a:pPr marL="457200" indent="-457200">
@@ -8093,7 +7481,7 @@
               <a:buFont typeface="+mj-lt"/>
               <a:buAutoNum type="arabicPeriod" startAt="4"/>
             </a:pPr>
-            <a:endParaRPr lang="en-US" dirty="0" smtClean="0"/>
+            <a:endParaRPr lang="en-US" dirty="0"/>
           </a:p>
           <a:p>
             <a:pPr marL="457200" indent="-457200">
@@ -8149,7 +7537,7 @@
           </a:lstStyle>
           <a:p>
             <a:r>
-              <a:rPr lang="en-US" smtClean="0"/>
+              <a:rPr lang="en-US"/>
               <a:t>First steps: set-up your workspace</a:t>
             </a:r>
             <a:endParaRPr lang="sv-SE" dirty="0"/>
@@ -8178,13 +7566,6 @@
       </p:transition>
     </mc:Fallback>
   </mc:AlternateContent>
-  <p:timing>
-    <p:tnLst>
-      <p:par>
-        <p:cTn id="1" dur="indefinite" restart="never" nodeType="tmRoot"/>
-      </p:par>
-    </p:tnLst>
-  </p:timing>
 </p:sld>
 </file>
 
@@ -8256,7 +7637,7 @@
           <a:lstStyle/>
           <a:p>
             <a:r>
-              <a:rPr lang="en-US" dirty="0" smtClean="0"/>
+              <a:rPr lang="en-US" dirty="0"/>
               <a:t>If you decide to </a:t>
             </a:r>
             <a:r>
@@ -8267,64 +7648,64 @@
           <a:p>
             <a:pPr lvl="1"/>
             <a:r>
-              <a:rPr lang="en-US" dirty="0" smtClean="0"/>
+              <a:rPr lang="en-US" dirty="0"/>
               <a:t>Commit your functions in \R </a:t>
             </a:r>
             <a:r>
-              <a:rPr lang="en-US" dirty="0" err="1" smtClean="0"/>
+              <a:rPr lang="en-US" dirty="0" err="1"/>
               <a:t>dir</a:t>
             </a:r>
-            <a:endParaRPr lang="en-US" dirty="0" smtClean="0"/>
+            <a:endParaRPr lang="en-US" dirty="0"/>
           </a:p>
           <a:p>
             <a:pPr lvl="1"/>
             <a:r>
-              <a:rPr lang="en-US" dirty="0" smtClean="0"/>
+              <a:rPr lang="en-US" dirty="0"/>
               <a:t>Commit your data to \data </a:t>
             </a:r>
             <a:r>
-              <a:rPr lang="en-US" dirty="0" err="1" smtClean="0"/>
+              <a:rPr lang="en-US" dirty="0" err="1"/>
               <a:t>dir</a:t>
             </a:r>
             <a:r>
-              <a:rPr lang="en-US" dirty="0" smtClean="0"/>
+              <a:rPr lang="en-US" dirty="0"/>
               <a:t> </a:t>
             </a:r>
           </a:p>
           <a:p>
             <a:pPr lvl="1"/>
             <a:r>
-              <a:rPr lang="en-US" dirty="0" smtClean="0"/>
+              <a:rPr lang="en-US" dirty="0"/>
               <a:t>Commit your vignettes to \vignettes </a:t>
             </a:r>
             <a:r>
-              <a:rPr lang="en-US" dirty="0" err="1" smtClean="0"/>
+              <a:rPr lang="en-US" dirty="0" err="1"/>
               <a:t>dir</a:t>
             </a:r>
-            <a:endParaRPr lang="en-US" dirty="0" smtClean="0"/>
+            <a:endParaRPr lang="en-US" dirty="0"/>
           </a:p>
           <a:p>
             <a:pPr lvl="1"/>
             <a:r>
-              <a:rPr lang="en-US" dirty="0" smtClean="0"/>
+              <a:rPr lang="en-US" dirty="0"/>
               <a:t>Commit your tests to \tests </a:t>
             </a:r>
             <a:r>
-              <a:rPr lang="en-US" dirty="0" err="1" smtClean="0"/>
+              <a:rPr lang="en-US" dirty="0" err="1"/>
               <a:t>dir</a:t>
             </a:r>
-            <a:endParaRPr lang="en-US" dirty="0" smtClean="0"/>
-          </a:p>
-          <a:p>
-            <a:endParaRPr lang="en-US" dirty="0" smtClean="0"/>
-          </a:p>
-          <a:p>
-            <a:r>
-              <a:rPr lang="en-US" dirty="0" smtClean="0"/>
+            <a:endParaRPr lang="en-US" dirty="0"/>
+          </a:p>
+          <a:p>
+            <a:endParaRPr lang="en-US" dirty="0"/>
+          </a:p>
+          <a:p>
+            <a:r>
+              <a:rPr lang="en-US" dirty="0"/>
               <a:t>If you decide to work on  </a:t>
             </a:r>
             <a:r>
-              <a:rPr lang="en-GB" dirty="0" smtClean="0"/>
+              <a:rPr lang="en-GB" dirty="0"/>
               <a:t>WGRDBES-EST\personal</a:t>
             </a:r>
             <a:endParaRPr lang="en-US" dirty="0"/>
@@ -8332,101 +7713,81 @@
           <a:p>
             <a:pPr lvl="1"/>
             <a:r>
-              <a:rPr lang="en-GB" dirty="0" smtClean="0"/>
-              <a:t>Open </a:t>
-            </a:r>
-            <a:r>
               <a:rPr lang="en-GB" dirty="0"/>
-              <a:t>a folder </a:t>
-            </a:r>
-            <a:r>
-              <a:rPr lang="en-GB" dirty="0" smtClean="0"/>
-              <a:t>with </a:t>
-            </a:r>
-            <a:r>
-              <a:rPr lang="en-GB" dirty="0"/>
-              <a:t>your </a:t>
-            </a:r>
-            <a:r>
-              <a:rPr lang="en-GB" dirty="0" smtClean="0">
+              <a:t>Open a folder with your </a:t>
+            </a:r>
+            <a:r>
+              <a:rPr lang="en-GB" dirty="0">
                 <a:solidFill>
                   <a:srgbClr val="FF0000"/>
                 </a:solidFill>
               </a:rPr>
               <a:t>name</a:t>
             </a:r>
-            <a:endParaRPr lang="en-GB" dirty="0" smtClean="0"/>
+            <a:endParaRPr lang="en-GB" dirty="0"/>
           </a:p>
           <a:p>
             <a:pPr lvl="1"/>
             <a:r>
-              <a:rPr lang="en-US" dirty="0" smtClean="0"/>
-              <a:t>Create </a:t>
-            </a:r>
-            <a:r>
-              <a:rPr lang="en-US" dirty="0"/>
-              <a:t>a \R </a:t>
-            </a:r>
-            <a:r>
-              <a:rPr lang="en-US" dirty="0" smtClean="0"/>
-              <a:t>directory and \data to put your functions and data </a:t>
+              <a:rPr lang="en-US" dirty="0"/>
+              <a:t>Create a \R directory and \data to put your functions and data </a:t>
             </a:r>
           </a:p>
           <a:p>
             <a:pPr lvl="1"/>
             <a:r>
-              <a:rPr lang="en-US" dirty="0" smtClean="0"/>
+              <a:rPr lang="en-US" dirty="0"/>
               <a:t>Vignettes/Examples that details use of your functions:</a:t>
             </a:r>
           </a:p>
           <a:p>
             <a:pPr lvl="2"/>
             <a:r>
-              <a:rPr lang="en-US" dirty="0" smtClean="0"/>
+              <a:rPr lang="en-US" dirty="0"/>
               <a:t>If you can </a:t>
             </a:r>
             <a:r>
-              <a:rPr lang="en-US" dirty="0" err="1" smtClean="0"/>
+              <a:rPr lang="en-US" dirty="0" err="1"/>
               <a:t>Rmd</a:t>
             </a:r>
             <a:r>
-              <a:rPr lang="en-US" dirty="0" smtClean="0"/>
+              <a:rPr lang="en-US" dirty="0"/>
               <a:t>: Create a \vignettes to put your .</a:t>
             </a:r>
             <a:r>
-              <a:rPr lang="en-US" dirty="0" err="1" smtClean="0"/>
+              <a:rPr lang="en-US" dirty="0" err="1"/>
               <a:t>Rmd</a:t>
             </a:r>
             <a:r>
-              <a:rPr lang="en-US" dirty="0" smtClean="0"/>
+              <a:rPr lang="en-US" dirty="0"/>
               <a:t> vignettes there</a:t>
             </a:r>
           </a:p>
           <a:p>
             <a:pPr lvl="2"/>
             <a:r>
-              <a:rPr lang="en-US" dirty="0" smtClean="0"/>
+              <a:rPr lang="en-US" dirty="0"/>
               <a:t>If you cannot </a:t>
             </a:r>
             <a:r>
-              <a:rPr lang="en-US" dirty="0" err="1" smtClean="0"/>
+              <a:rPr lang="en-US" dirty="0" err="1"/>
               <a:t>Rmd</a:t>
             </a:r>
             <a:r>
-              <a:rPr lang="en-US" dirty="0" smtClean="0"/>
+              <a:rPr lang="en-US" dirty="0"/>
               <a:t>: Create “</a:t>
             </a:r>
             <a:r>
-              <a:rPr lang="en-US" dirty="0" err="1" smtClean="0"/>
+              <a:rPr lang="en-US" dirty="0" err="1"/>
               <a:t>example_script.R</a:t>
             </a:r>
             <a:r>
-              <a:rPr lang="en-US" dirty="0" smtClean="0"/>
+              <a:rPr lang="en-US" dirty="0"/>
               <a:t>” in normal R and place it in the root of your personal folder</a:t>
             </a:r>
           </a:p>
           <a:p>
-            <a:endParaRPr lang="en-US" dirty="0" smtClean="0"/>
+            <a:endParaRPr lang="en-US" dirty="0"/>
           </a:p>
         </p:txBody>
       </p:sp>
@@ -8540,7 +7901,7 @@
           <a:lstStyle/>
           <a:p>
             <a:pPr algn="l"/>
-            <a:endParaRPr lang="sv-SE" sz="2000" dirty="0" err="1" smtClean="0">
+            <a:endParaRPr lang="sv-SE" sz="2000" dirty="0" err="1">
               <a:solidFill>
                 <a:schemeClr val="accent1"/>
               </a:solidFill>
@@ -8572,7 +7933,7 @@
           <a:p>
             <a:pPr algn="l"/>
             <a:r>
-              <a:rPr lang="en-US" sz="2000" b="1" dirty="0" smtClean="0">
+              <a:rPr lang="en-US" sz="2000" b="1" dirty="0">
                 <a:solidFill>
                   <a:schemeClr val="accent1"/>
                 </a:solidFill>
@@ -8584,7 +7945,7 @@
           <a:p>
             <a:pPr algn="l"/>
             <a:r>
-              <a:rPr lang="en-US" sz="2000" dirty="0" smtClean="0">
+              <a:rPr lang="en-US" sz="2000" dirty="0">
                 <a:solidFill>
                   <a:schemeClr val="accent1"/>
                 </a:solidFill>
@@ -8596,14 +7957,14 @@
           <a:p>
             <a:pPr algn="l"/>
             <a:r>
-              <a:rPr lang="en-US" sz="2000" dirty="0" smtClean="0">
+              <a:rPr lang="en-US" sz="2000" dirty="0">
                 <a:solidFill>
                   <a:schemeClr val="accent1"/>
                 </a:solidFill>
               </a:rPr>
               <a:t>Do not forget to open an issue</a:t>
             </a:r>
-            <a:endParaRPr lang="sv-SE" sz="2000" dirty="0" err="1" smtClean="0">
+            <a:endParaRPr lang="sv-SE" sz="2000" dirty="0" err="1">
               <a:solidFill>
                 <a:schemeClr val="accent1"/>
               </a:solidFill>
@@ -8634,13 +7995,6 @@
       </p:transition>
     </mc:Fallback>
   </mc:AlternateContent>
-  <p:timing>
-    <p:tnLst>
-      <p:par>
-        <p:cTn id="1" dur="indefinite" restart="never" nodeType="tmRoot"/>
-      </p:par>
-    </p:tnLst>
-  </p:timing>
 </p:sld>
 </file>
 
@@ -8682,7 +8036,7 @@
           <a:lstStyle/>
           <a:p>
             <a:r>
-              <a:rPr lang="en-US" dirty="0" smtClean="0"/>
+              <a:rPr lang="en-US" dirty="0"/>
               <a:t>First steps: set-up your workspace</a:t>
             </a:r>
             <a:endParaRPr lang="sv-SE" dirty="0"/>
@@ -8725,15 +8079,7 @@
             </a:r>
             <a:r>
               <a:rPr lang="en-US" dirty="0"/>
-              <a:t> developed </a:t>
-            </a:r>
-            <a:r>
-              <a:rPr lang="en-US" dirty="0" smtClean="0"/>
-              <a:t>during </a:t>
-            </a:r>
-            <a:r>
-              <a:rPr lang="en-US" dirty="0"/>
-              <a:t>WKRDB-EST 1-2 </a:t>
+              <a:t> developed during WKRDB-EST 1-2 </a:t>
             </a:r>
             <a:r>
               <a:rPr lang="en-US" dirty="0">
@@ -8840,7 +8186,7 @@
               <a:buFont typeface="+mj-lt"/>
               <a:buAutoNum type="arabicPeriod" startAt="8"/>
             </a:pPr>
-            <a:endParaRPr lang="en-US" dirty="0" smtClean="0"/>
+            <a:endParaRPr lang="en-US" dirty="0"/>
           </a:p>
           <a:p>
             <a:pPr marL="457200" indent="-457200">
@@ -8854,7 +8200,7 @@
               <a:buFont typeface="+mj-lt"/>
               <a:buAutoNum type="arabicPeriod" startAt="8"/>
             </a:pPr>
-            <a:endParaRPr lang="en-US" dirty="0" smtClean="0"/>
+            <a:endParaRPr lang="en-US" dirty="0"/>
           </a:p>
           <a:p>
             <a:pPr marL="457200" indent="-457200">
@@ -8868,21 +8214,21 @@
               <a:buFont typeface="+mj-lt"/>
               <a:buAutoNum type="arabicPeriod" startAt="8"/>
             </a:pPr>
-            <a:endParaRPr lang="en-US" dirty="0" smtClean="0"/>
+            <a:endParaRPr lang="en-US" dirty="0"/>
           </a:p>
           <a:p>
             <a:pPr marL="457200" indent="-457200">
               <a:buFont typeface="+mj-lt"/>
               <a:buAutoNum type="arabicPeriod" startAt="8"/>
             </a:pPr>
-            <a:endParaRPr lang="en-US" dirty="0" smtClean="0"/>
+            <a:endParaRPr lang="en-US" dirty="0"/>
           </a:p>
           <a:p>
             <a:pPr marL="457200" indent="-457200">
               <a:buFont typeface="+mj-lt"/>
               <a:buAutoNum type="arabicPeriod" startAt="8"/>
             </a:pPr>
-            <a:endParaRPr lang="en-US" dirty="0" smtClean="0"/>
+            <a:endParaRPr lang="en-US" dirty="0"/>
           </a:p>
           <a:p>
             <a:pPr marL="457200" indent="-457200">
@@ -8916,7 +8262,7 @@
           <a:p>
             <a:pPr algn="l"/>
             <a:r>
-              <a:rPr lang="en-US" sz="2000" dirty="0" smtClean="0">
+              <a:rPr lang="en-US" sz="2000" dirty="0">
                 <a:solidFill>
                   <a:schemeClr val="accent1"/>
                 </a:solidFill>
@@ -8933,17 +8279,9 @@
                   <a:schemeClr val="accent1"/>
                 </a:solidFill>
               </a:rPr>
-              <a:t>a</a:t>
-            </a:r>
-            <a:r>
-              <a:rPr lang="en-US" sz="2000" dirty="0" smtClean="0">
-                <a:solidFill>
-                  <a:schemeClr val="accent1"/>
-                </a:solidFill>
-              </a:rPr>
-              <a:t>nd open an issue!</a:t>
-            </a:r>
-            <a:endParaRPr lang="sv-SE" sz="2000" dirty="0" err="1" smtClean="0">
+              <a:t>and open an issue!</a:t>
+            </a:r>
+            <a:endParaRPr lang="sv-SE" sz="2000" dirty="0" err="1">
               <a:solidFill>
                 <a:schemeClr val="accent1"/>
               </a:solidFill>
@@ -8974,13 +8312,6 @@
       </p:transition>
     </mc:Fallback>
   </mc:AlternateContent>
-  <p:timing>
-    <p:tnLst>
-      <p:par>
-        <p:cTn id="1" dur="indefinite" restart="never" nodeType="tmRoot"/>
-      </p:par>
-    </p:tnLst>
-  </p:timing>
 </p:sld>
 </file>
 
@@ -9024,7 +8355,7 @@
           <a:lstStyle/>
           <a:p>
             <a:r>
-              <a:rPr lang="en-US" dirty="0" smtClean="0"/>
+              <a:rPr lang="en-US" dirty="0"/>
               <a:t>When you are done with your function</a:t>
             </a:r>
             <a:endParaRPr lang="sv-SE" dirty="0"/>
@@ -9058,7 +8389,7 @@
               <a:buAutoNum type="arabicPeriod"/>
             </a:pPr>
             <a:r>
-              <a:rPr lang="en-US" dirty="0" smtClean="0"/>
+              <a:rPr lang="en-US" dirty="0"/>
               <a:t>Add the “Minimum standard documentation” preamble</a:t>
             </a:r>
           </a:p>
@@ -9074,14 +8405,14 @@
               <a:buFont typeface="+mj-lt"/>
               <a:buAutoNum type="arabicPeriod"/>
             </a:pPr>
-            <a:endParaRPr lang="en-US" dirty="0" smtClean="0"/>
+            <a:endParaRPr lang="en-US" dirty="0"/>
           </a:p>
           <a:p>
             <a:pPr marL="457200" indent="-457200">
               <a:buFont typeface="+mj-lt"/>
               <a:buAutoNum type="arabicPeriod"/>
             </a:pPr>
-            <a:endParaRPr lang="en-US" dirty="0" smtClean="0"/>
+            <a:endParaRPr lang="en-US" dirty="0"/>
           </a:p>
           <a:p>
             <a:pPr marL="457200" indent="-457200">
@@ -9095,20 +8426,20 @@
               <a:buFont typeface="+mj-lt"/>
               <a:buAutoNum type="arabicPeriod"/>
             </a:pPr>
-            <a:endParaRPr lang="en-US" dirty="0" smtClean="0"/>
+            <a:endParaRPr lang="en-US" dirty="0"/>
           </a:p>
           <a:p>
             <a:pPr marL="0" indent="0">
               <a:buNone/>
             </a:pPr>
-            <a:endParaRPr lang="en-US" dirty="0" smtClean="0"/>
+            <a:endParaRPr lang="en-US" dirty="0"/>
           </a:p>
           <a:p>
             <a:pPr marL="457200" indent="-457200">
               <a:buFont typeface="+mj-lt"/>
               <a:buAutoNum type="arabicPeriod"/>
             </a:pPr>
-            <a:endParaRPr lang="en-US" dirty="0" smtClean="0"/>
+            <a:endParaRPr lang="en-US" dirty="0"/>
           </a:p>
           <a:p>
             <a:pPr marL="457200" indent="-457200">
@@ -9165,32 +8496,28 @@
           <a:lstStyle/>
           <a:p>
             <a:r>
-              <a:rPr lang="sv-SE" sz="1400" dirty="0" err="1" smtClean="0"/>
+              <a:rPr lang="sv-SE" sz="1400" dirty="0" err="1"/>
               <a:t>Some</a:t>
             </a:r>
             <a:r>
-              <a:rPr lang="sv-SE" sz="1400" dirty="0" smtClean="0"/>
+              <a:rPr lang="sv-SE" sz="1400" dirty="0"/>
               <a:t> </a:t>
             </a:r>
             <a:r>
-              <a:rPr lang="sv-SE" sz="1400" dirty="0" err="1" smtClean="0"/>
+              <a:rPr lang="sv-SE" sz="1400" dirty="0" err="1"/>
               <a:t>more</a:t>
             </a:r>
             <a:r>
-              <a:rPr lang="sv-SE" sz="1400" dirty="0" smtClean="0"/>
+              <a:rPr lang="sv-SE" sz="1400" dirty="0"/>
               <a:t> info </a:t>
             </a:r>
             <a:r>
-              <a:rPr lang="sv-SE" sz="1400" dirty="0" err="1" smtClean="0"/>
+              <a:rPr lang="sv-SE" sz="1400" dirty="0" err="1"/>
               <a:t>e.g</a:t>
             </a:r>
             <a:r>
-              <a:rPr lang="sv-SE" sz="1400" dirty="0" smtClean="0"/>
-              <a:t>., https</a:t>
-            </a:r>
-            <a:r>
               <a:rPr lang="sv-SE" sz="1400" dirty="0"/>
-              <a:t>://riptutorial.com/r/example/18279/documenting-a-package-with-roxygen2</a:t>
+              <a:t>., https://riptutorial.com/r/example/18279/documenting-a-package-with-roxygen2</a:t>
             </a:r>
           </a:p>
         </p:txBody>
@@ -9217,13 +8544,6 @@
       </p:transition>
     </mc:Fallback>
   </mc:AlternateContent>
-  <p:timing>
-    <p:tnLst>
-      <p:par>
-        <p:cTn id="1" dur="indefinite" restart="never" nodeType="tmRoot"/>
-      </p:par>
-    </p:tnLst>
-  </p:timing>
 </p:sld>
 </file>
 
@@ -9741,21 +9061,6 @@
 </file>
 
 <file path=customXml/item1.xml><?xml version="1.0" encoding="utf-8"?>
-<?mso-contentType ?>
-<FormTemplates xmlns="http://schemas.microsoft.com/sharepoint/v3/contenttype/forms">
-  <Display>DocumentLibraryForm</Display>
-  <Edit>DocumentLibraryForm</Edit>
-  <New>DocumentLibraryForm</New>
-</FormTemplates>
-</file>
-
-<file path=customXml/item2.xml><?xml version="1.0" encoding="utf-8"?>
-<p:properties xmlns:p="http://schemas.microsoft.com/office/2006/metadata/properties" xmlns:xsi="http://www.w3.org/2001/XMLSchema-instance" xmlns:pc="http://schemas.microsoft.com/office/infopath/2007/PartnerControls">
-  <documentManagement/>
-</p:properties>
-</file>
-
-<file path=customXml/item3.xml><?xml version="1.0" encoding="utf-8"?>
 <ct:contentTypeSchema xmlns:ct="http://schemas.microsoft.com/office/2006/metadata/contentType" xmlns:ma="http://schemas.microsoft.com/office/2006/metadata/properties/metaAttributes" ct:_="" ma:_="" ma:contentTypeName="Document" ma:contentTypeID="0x010100318EAC08ED3A4D4DAA920947DB5E144D" ma:contentTypeVersion="1" ma:contentTypeDescription="Create a new document." ma:contentTypeScope="" ma:versionID="c51e592a787050860f1195050ce8844f">
   <xsd:schema xmlns:xsd="http://www.w3.org/2001/XMLSchema" xmlns:xs="http://www.w3.org/2001/XMLSchema" xmlns:p="http://schemas.microsoft.com/office/2006/metadata/properties" xmlns:ns2="4d5313c0-c1e6-4122-afa9-da1ccdba405d" targetNamespace="http://schemas.microsoft.com/office/2006/metadata/properties" ma:root="true" ma:fieldsID="b17605de6e1dd7ee2c1d376d0ce33c47" ns2:_="">
     <xsd:import namespace="4d5313c0-c1e6-4122-afa9-da1ccdba405d"/>
@@ -9895,10 +9200,35 @@
 </ct:contentTypeSchema>
 </file>
 
+<file path=customXml/item2.xml><?xml version="1.0" encoding="utf-8"?>
+<p:properties xmlns:p="http://schemas.microsoft.com/office/2006/metadata/properties" xmlns:xsi="http://www.w3.org/2001/XMLSchema-instance" xmlns:pc="http://schemas.microsoft.com/office/infopath/2007/PartnerControls">
+  <documentManagement/>
+</p:properties>
+</file>
+
+<file path=customXml/item3.xml><?xml version="1.0" encoding="utf-8"?>
+<?mso-contentType ?>
+<FormTemplates xmlns="http://schemas.microsoft.com/sharepoint/v3/contenttype/forms">
+  <Display>DocumentLibraryForm</Display>
+  <Edit>DocumentLibraryForm</Edit>
+  <New>DocumentLibraryForm</New>
+</FormTemplates>
+</file>
+
 <file path=customXml/itemProps1.xml><?xml version="1.0" encoding="utf-8"?>
-<ds:datastoreItem xmlns:ds="http://schemas.openxmlformats.org/officeDocument/2006/customXml" ds:itemID="{27766D45-EAD8-4B35-81C7-D364DC0604F0}">
+<ds:datastoreItem xmlns:ds="http://schemas.openxmlformats.org/officeDocument/2006/customXml" ds:itemID="{CF9E2F9C-D44F-403E-BD4F-E865F9788543}">
   <ds:schemaRefs>
-    <ds:schemaRef ds:uri="http://schemas.microsoft.com/sharepoint/v3/contenttype/forms"/>
+    <ds:schemaRef ds:uri="http://schemas.microsoft.com/office/2006/metadata/contentType"/>
+    <ds:schemaRef ds:uri="http://schemas.microsoft.com/office/2006/metadata/properties/metaAttributes"/>
+    <ds:schemaRef ds:uri="http://www.w3.org/2001/XMLSchema"/>
+    <ds:schemaRef ds:uri="http://schemas.microsoft.com/office/2006/metadata/properties"/>
+    <ds:schemaRef ds:uri="4d5313c0-c1e6-4122-afa9-da1ccdba405d"/>
+    <ds:schemaRef ds:uri="http://schemas.microsoft.com/office/2006/documentManagement/types"/>
+    <ds:schemaRef ds:uri="http://schemas.microsoft.com/office/infopath/2007/PartnerControls"/>
+    <ds:schemaRef ds:uri="http://schemas.openxmlformats.org/package/2006/metadata/core-properties"/>
+    <ds:schemaRef ds:uri="http://purl.org/dc/elements/1.1/"/>
+    <ds:schemaRef ds:uri="http://purl.org/dc/terms/"/>
+    <ds:schemaRef ds:uri="http://schemas.microsoft.com/internal/obd"/>
   </ds:schemaRefs>
 </ds:datastoreItem>
 </file>
@@ -9920,19 +9250,9 @@
 </file>
 
 <file path=customXml/itemProps3.xml><?xml version="1.0" encoding="utf-8"?>
-<ds:datastoreItem xmlns:ds="http://schemas.openxmlformats.org/officeDocument/2006/customXml" ds:itemID="{CF9E2F9C-D44F-403E-BD4F-E865F9788543}">
+<ds:datastoreItem xmlns:ds="http://schemas.openxmlformats.org/officeDocument/2006/customXml" ds:itemID="{27766D45-EAD8-4B35-81C7-D364DC0604F0}">
   <ds:schemaRefs>
-    <ds:schemaRef ds:uri="http://schemas.microsoft.com/office/2006/metadata/contentType"/>
-    <ds:schemaRef ds:uri="http://schemas.microsoft.com/office/2006/metadata/properties/metaAttributes"/>
-    <ds:schemaRef ds:uri="http://www.w3.org/2001/XMLSchema"/>
-    <ds:schemaRef ds:uri="http://schemas.microsoft.com/office/2006/metadata/properties"/>
-    <ds:schemaRef ds:uri="4d5313c0-c1e6-4122-afa9-da1ccdba405d"/>
-    <ds:schemaRef ds:uri="http://schemas.microsoft.com/office/2006/documentManagement/types"/>
-    <ds:schemaRef ds:uri="http://schemas.microsoft.com/office/infopath/2007/PartnerControls"/>
-    <ds:schemaRef ds:uri="http://schemas.openxmlformats.org/package/2006/metadata/core-properties"/>
-    <ds:schemaRef ds:uri="http://purl.org/dc/elements/1.1/"/>
-    <ds:schemaRef ds:uri="http://purl.org/dc/terms/"/>
-    <ds:schemaRef ds:uri="http://schemas.microsoft.com/internal/obd"/>
+    <ds:schemaRef ds:uri="http://schemas.microsoft.com/sharepoint/v3/contenttype/forms"/>
   </ds:schemaRefs>
 </ds:datastoreItem>
 </file>